--- a/output_pptx/Joy_To_The_World.pptx
+++ b/output_pptx/Joy_To_The_World.pptx
@@ -3123,8 +3123,8 @@
         </p:nvSpPr>
         <p:spPr>
           <a:xfrm>
-            <a:off x="594360" y="2258568"/>
-            <a:ext cx="11002975" cy="685800"/>
+            <a:off x="640080" y="2052828"/>
+            <a:ext cx="10911535" cy="731520"/>
           </a:xfrm>
           <a:prstGeom prst="rect">
             <a:avLst/>
@@ -3139,7 +3139,7 @@
           <a:p>
             <a:pPr algn="ctr"/>
             <a:r>
-              <a:rPr sz="4400" b="1" i="0">
+              <a:rPr sz="4800" b="1" i="0">
                 <a:solidFill>
                   <a:srgbClr val="FFFFFF"/>
                 </a:solidFill>
@@ -3158,8 +3158,8 @@
         </p:nvSpPr>
         <p:spPr>
           <a:xfrm>
-            <a:off x="594360" y="2980944"/>
-            <a:ext cx="11002975" cy="347472"/>
+            <a:off x="640080" y="2985516"/>
+            <a:ext cx="10911535" cy="731520"/>
           </a:xfrm>
           <a:prstGeom prst="rect">
             <a:avLst/>
@@ -3174,83 +3174,13 @@
           <a:p>
             <a:pPr algn="ctr"/>
             <a:r>
-              <a:rPr sz="2200" b="0" i="1">
-                <a:solidFill>
-                  <a:srgbClr val="8C8C8C"/>
-                </a:solidFill>
-                <a:latin typeface="Arial"/>
-              </a:rPr>
-              <a:t/>
-            </a:r>
-          </a:p>
-        </p:txBody>
-      </p:sp>
-      <p:sp>
-        <p:nvSpPr>
-          <p:cNvPr id="4" name="TextBox 3"/>
-          <p:cNvSpPr txBox="1"/>
-          <p:nvPr/>
-        </p:nvSpPr>
-        <p:spPr>
-          <a:xfrm>
-            <a:off x="594360" y="3529584"/>
-            <a:ext cx="11002975" cy="685800"/>
-          </a:xfrm>
-          <a:prstGeom prst="rect">
-            <a:avLst/>
-          </a:prstGeom>
-          <a:noFill/>
-        </p:spPr>
-        <p:txBody>
-          <a:bodyPr wrap="square">
-            <a:spAutoFit/>
-          </a:bodyPr>
-          <a:lstStyle/>
-          <a:p>
-            <a:pPr algn="ctr"/>
-            <a:r>
-              <a:rPr sz="4400" b="1" i="0">
+              <a:rPr sz="4800" b="1" i="0">
                 <a:solidFill>
                   <a:srgbClr val="FFFFFF"/>
                 </a:solidFill>
                 <a:latin typeface="Arial"/>
               </a:rPr>
               <a:t>Alegria ao mundo! O Senhor vem!</a:t>
-            </a:r>
-          </a:p>
-        </p:txBody>
-      </p:sp>
-      <p:sp>
-        <p:nvSpPr>
-          <p:cNvPr id="5" name="TextBox 4"/>
-          <p:cNvSpPr txBox="1"/>
-          <p:nvPr/>
-        </p:nvSpPr>
-        <p:spPr>
-          <a:xfrm>
-            <a:off x="594360" y="4251960"/>
-            <a:ext cx="11002975" cy="347472"/>
-          </a:xfrm>
-          <a:prstGeom prst="rect">
-            <a:avLst/>
-          </a:prstGeom>
-          <a:noFill/>
-        </p:spPr>
-        <p:txBody>
-          <a:bodyPr wrap="square">
-            <a:spAutoFit/>
-          </a:bodyPr>
-          <a:lstStyle/>
-          <a:p>
-            <a:pPr algn="ctr"/>
-            <a:r>
-              <a:rPr sz="2200" b="0" i="1">
-                <a:solidFill>
-                  <a:srgbClr val="8C8C8C"/>
-                </a:solidFill>
-                <a:latin typeface="Arial"/>
-              </a:rPr>
-              <a:t/>
             </a:r>
           </a:p>
         </p:txBody>
@@ -3289,8 +3219,8 @@
         </p:nvSpPr>
         <p:spPr>
           <a:xfrm>
-            <a:off x="594360" y="2258568"/>
-            <a:ext cx="11002975" cy="685800"/>
+            <a:off x="640080" y="2052828"/>
+            <a:ext cx="10911535" cy="731520"/>
           </a:xfrm>
           <a:prstGeom prst="rect">
             <a:avLst/>
@@ -3305,7 +3235,7 @@
           <a:p>
             <a:pPr algn="ctr"/>
             <a:r>
-              <a:rPr sz="3610" b="1" i="0">
+              <a:rPr sz="3900" b="1" i="0">
                 <a:solidFill>
                   <a:srgbClr val="FFFFFF"/>
                 </a:solidFill>
@@ -3324,8 +3254,8 @@
         </p:nvSpPr>
         <p:spPr>
           <a:xfrm>
-            <a:off x="594360" y="2980944"/>
-            <a:ext cx="11002975" cy="347472"/>
+            <a:off x="640080" y="2985516"/>
+            <a:ext cx="10911535" cy="731520"/>
           </a:xfrm>
           <a:prstGeom prst="rect">
             <a:avLst/>
@@ -3340,83 +3270,13 @@
           <a:p>
             <a:pPr algn="ctr"/>
             <a:r>
-              <a:rPr sz="2200" b="0" i="1">
-                <a:solidFill>
-                  <a:srgbClr val="8C8C8C"/>
-                </a:solidFill>
-                <a:latin typeface="Arial"/>
-              </a:rPr>
-              <a:t/>
-            </a:r>
-          </a:p>
-        </p:txBody>
-      </p:sp>
-      <p:sp>
-        <p:nvSpPr>
-          <p:cNvPr id="4" name="TextBox 3"/>
-          <p:cNvSpPr txBox="1"/>
-          <p:nvPr/>
-        </p:nvSpPr>
-        <p:spPr>
-          <a:xfrm>
-            <a:off x="594360" y="3529584"/>
-            <a:ext cx="11002975" cy="685800"/>
-          </a:xfrm>
-          <a:prstGeom prst="rect">
-            <a:avLst/>
-          </a:prstGeom>
-          <a:noFill/>
-        </p:spPr>
-        <p:txBody>
-          <a:bodyPr wrap="square">
-            <a:spAutoFit/>
-          </a:bodyPr>
-          <a:lstStyle/>
-          <a:p>
-            <a:pPr algn="ctr"/>
-            <a:r>
-              <a:rPr sz="3610" b="1" i="0">
+              <a:rPr sz="3900" b="1" i="0">
                 <a:solidFill>
                   <a:srgbClr val="FFFFFF"/>
                 </a:solidFill>
                 <a:latin typeface="Arial"/>
               </a:rPr>
               <a:t>E as maravilhas, maravilhas do Seu amor</a:t>
-            </a:r>
-          </a:p>
-        </p:txBody>
-      </p:sp>
-      <p:sp>
-        <p:nvSpPr>
-          <p:cNvPr id="5" name="TextBox 4"/>
-          <p:cNvSpPr txBox="1"/>
-          <p:nvPr/>
-        </p:nvSpPr>
-        <p:spPr>
-          <a:xfrm>
-            <a:off x="594360" y="4251960"/>
-            <a:ext cx="11002975" cy="347472"/>
-          </a:xfrm>
-          <a:prstGeom prst="rect">
-            <a:avLst/>
-          </a:prstGeom>
-          <a:noFill/>
-        </p:spPr>
-        <p:txBody>
-          <a:bodyPr wrap="square">
-            <a:spAutoFit/>
-          </a:bodyPr>
-          <a:lstStyle/>
-          <a:p>
-            <a:pPr algn="ctr"/>
-            <a:r>
-              <a:rPr sz="2200" b="0" i="1">
-                <a:solidFill>
-                  <a:srgbClr val="8C8C8C"/>
-                </a:solidFill>
-                <a:latin typeface="Arial"/>
-              </a:rPr>
-              <a:t/>
             </a:r>
           </a:p>
         </p:txBody>
@@ -3455,8 +3315,8 @@
         </p:nvSpPr>
         <p:spPr>
           <a:xfrm>
-            <a:off x="594360" y="2258568"/>
-            <a:ext cx="11002975" cy="685800"/>
+            <a:off x="640080" y="2052828"/>
+            <a:ext cx="10911535" cy="731520"/>
           </a:xfrm>
           <a:prstGeom prst="rect">
             <a:avLst/>
@@ -3471,7 +3331,7 @@
           <a:p>
             <a:pPr algn="ctr"/>
             <a:r>
-              <a:rPr sz="3911" b="1" i="0">
+              <a:rPr sz="4200" b="1" i="0">
                 <a:solidFill>
                   <a:srgbClr val="FFFFFF"/>
                 </a:solidFill>
@@ -3490,8 +3350,8 @@
         </p:nvSpPr>
         <p:spPr>
           <a:xfrm>
-            <a:off x="594360" y="2980944"/>
-            <a:ext cx="11002975" cy="347472"/>
+            <a:off x="640080" y="2985516"/>
+            <a:ext cx="10911535" cy="731520"/>
           </a:xfrm>
           <a:prstGeom prst="rect">
             <a:avLst/>
@@ -3506,83 +3366,13 @@
           <a:p>
             <a:pPr algn="ctr"/>
             <a:r>
-              <a:rPr sz="2200" b="0" i="1">
-                <a:solidFill>
-                  <a:srgbClr val="8C8C8C"/>
-                </a:solidFill>
-                <a:latin typeface="Arial"/>
-              </a:rPr>
-              <a:t/>
-            </a:r>
-          </a:p>
-        </p:txBody>
-      </p:sp>
-      <p:sp>
-        <p:nvSpPr>
-          <p:cNvPr id="4" name="TextBox 3"/>
-          <p:cNvSpPr txBox="1"/>
-          <p:nvPr/>
-        </p:nvSpPr>
-        <p:spPr>
-          <a:xfrm>
-            <a:off x="594360" y="3529584"/>
-            <a:ext cx="11002975" cy="685800"/>
-          </a:xfrm>
-          <a:prstGeom prst="rect">
-            <a:avLst/>
-          </a:prstGeom>
-          <a:noFill/>
-        </p:spPr>
-        <p:txBody>
-          <a:bodyPr wrap="square">
-            <a:spAutoFit/>
-          </a:bodyPr>
-          <a:lstStyle/>
-          <a:p>
-            <a:pPr algn="ctr"/>
-            <a:r>
-              <a:rPr sz="3610" b="1" i="0">
+              <a:rPr sz="3900" b="1" i="0">
                 <a:solidFill>
                   <a:srgbClr val="FFFFFF"/>
                 </a:solidFill>
                 <a:latin typeface="Arial"/>
               </a:rPr>
               <a:t>Ele governa o mundo com verdade e graça</a:t>
-            </a:r>
-          </a:p>
-        </p:txBody>
-      </p:sp>
-      <p:sp>
-        <p:nvSpPr>
-          <p:cNvPr id="5" name="TextBox 4"/>
-          <p:cNvSpPr txBox="1"/>
-          <p:nvPr/>
-        </p:nvSpPr>
-        <p:spPr>
-          <a:xfrm>
-            <a:off x="594360" y="4251960"/>
-            <a:ext cx="11002975" cy="347472"/>
-          </a:xfrm>
-          <a:prstGeom prst="rect">
-            <a:avLst/>
-          </a:prstGeom>
-          <a:noFill/>
-        </p:spPr>
-        <p:txBody>
-          <a:bodyPr wrap="square">
-            <a:spAutoFit/>
-          </a:bodyPr>
-          <a:lstStyle/>
-          <a:p>
-            <a:pPr algn="ctr"/>
-            <a:r>
-              <a:rPr sz="2200" b="0" i="1">
-                <a:solidFill>
-                  <a:srgbClr val="8C8C8C"/>
-                </a:solidFill>
-                <a:latin typeface="Arial"/>
-              </a:rPr>
-              <a:t/>
             </a:r>
           </a:p>
         </p:txBody>
@@ -3621,8 +3411,8 @@
         </p:nvSpPr>
         <p:spPr>
           <a:xfrm>
-            <a:off x="594360" y="2258568"/>
-            <a:ext cx="11002975" cy="685800"/>
+            <a:off x="640080" y="2052828"/>
+            <a:ext cx="10911535" cy="731520"/>
           </a:xfrm>
           <a:prstGeom prst="rect">
             <a:avLst/>
@@ -3637,7 +3427,7 @@
           <a:p>
             <a:pPr algn="ctr"/>
             <a:r>
-              <a:rPr sz="4400" b="1" i="0">
+              <a:rPr sz="4800" b="1" i="0">
                 <a:solidFill>
                   <a:srgbClr val="FFFFFF"/>
                 </a:solidFill>
@@ -3656,8 +3446,8 @@
         </p:nvSpPr>
         <p:spPr>
           <a:xfrm>
-            <a:off x="594360" y="2980944"/>
-            <a:ext cx="11002975" cy="347472"/>
+            <a:off x="640080" y="2985516"/>
+            <a:ext cx="10911535" cy="731520"/>
           </a:xfrm>
           <a:prstGeom prst="rect">
             <a:avLst/>
@@ -3672,83 +3462,13 @@
           <a:p>
             <a:pPr algn="ctr"/>
             <a:r>
-              <a:rPr sz="2200" b="0" i="1">
-                <a:solidFill>
-                  <a:srgbClr val="8C8C8C"/>
-                </a:solidFill>
-                <a:latin typeface="Arial"/>
-              </a:rPr>
-              <a:t/>
-            </a:r>
-          </a:p>
-        </p:txBody>
-      </p:sp>
-      <p:sp>
-        <p:nvSpPr>
-          <p:cNvPr id="4" name="TextBox 3"/>
-          <p:cNvSpPr txBox="1"/>
-          <p:nvPr/>
-        </p:nvSpPr>
-        <p:spPr>
-          <a:xfrm>
-            <a:off x="594360" y="3529584"/>
-            <a:ext cx="11002975" cy="685800"/>
-          </a:xfrm>
-          <a:prstGeom prst="rect">
-            <a:avLst/>
-          </a:prstGeom>
-          <a:noFill/>
-        </p:spPr>
-        <p:txBody>
-          <a:bodyPr wrap="square">
-            <a:spAutoFit/>
-          </a:bodyPr>
-          <a:lstStyle/>
-          <a:p>
-            <a:pPr algn="ctr"/>
-            <a:r>
-              <a:rPr sz="4400" b="1" i="0">
+              <a:rPr sz="4800" b="1" i="0">
                 <a:solidFill>
                   <a:srgbClr val="FFFFFF"/>
                 </a:solidFill>
                 <a:latin typeface="Arial"/>
               </a:rPr>
               <a:t>O esplendor de Sua retidão</a:t>
-            </a:r>
-          </a:p>
-        </p:txBody>
-      </p:sp>
-      <p:sp>
-        <p:nvSpPr>
-          <p:cNvPr id="5" name="TextBox 4"/>
-          <p:cNvSpPr txBox="1"/>
-          <p:nvPr/>
-        </p:nvSpPr>
-        <p:spPr>
-          <a:xfrm>
-            <a:off x="594360" y="4251960"/>
-            <a:ext cx="11002975" cy="347472"/>
-          </a:xfrm>
-          <a:prstGeom prst="rect">
-            <a:avLst/>
-          </a:prstGeom>
-          <a:noFill/>
-        </p:spPr>
-        <p:txBody>
-          <a:bodyPr wrap="square">
-            <a:spAutoFit/>
-          </a:bodyPr>
-          <a:lstStyle/>
-          <a:p>
-            <a:pPr algn="ctr"/>
-            <a:r>
-              <a:rPr sz="2200" b="0" i="1">
-                <a:solidFill>
-                  <a:srgbClr val="8C8C8C"/>
-                </a:solidFill>
-                <a:latin typeface="Arial"/>
-              </a:rPr>
-              <a:t/>
             </a:r>
           </a:p>
         </p:txBody>
@@ -3787,8 +3507,8 @@
         </p:nvSpPr>
         <p:spPr>
           <a:xfrm>
-            <a:off x="594360" y="2258568"/>
-            <a:ext cx="11002975" cy="685800"/>
+            <a:off x="640080" y="2052828"/>
+            <a:ext cx="10911535" cy="731520"/>
           </a:xfrm>
           <a:prstGeom prst="rect">
             <a:avLst/>
@@ -3803,7 +3523,7 @@
           <a:p>
             <a:pPr algn="ctr"/>
             <a:r>
-              <a:rPr sz="4400" b="1" i="0">
+              <a:rPr sz="4800" b="1" i="0">
                 <a:solidFill>
                   <a:srgbClr val="FFFFFF"/>
                 </a:solidFill>
@@ -3822,8 +3542,8 @@
         </p:nvSpPr>
         <p:spPr>
           <a:xfrm>
-            <a:off x="594360" y="2980944"/>
-            <a:ext cx="11002975" cy="347472"/>
+            <a:off x="640080" y="2985516"/>
+            <a:ext cx="10911535" cy="731520"/>
           </a:xfrm>
           <a:prstGeom prst="rect">
             <a:avLst/>
@@ -3838,83 +3558,13 @@
           <a:p>
             <a:pPr algn="ctr"/>
             <a:r>
-              <a:rPr sz="2200" b="0" i="1">
-                <a:solidFill>
-                  <a:srgbClr val="8C8C8C"/>
-                </a:solidFill>
-                <a:latin typeface="Arial"/>
-              </a:rPr>
-              <a:t/>
-            </a:r>
-          </a:p>
-        </p:txBody>
-      </p:sp>
-      <p:sp>
-        <p:nvSpPr>
-          <p:cNvPr id="4" name="TextBox 3"/>
-          <p:cNvSpPr txBox="1"/>
-          <p:nvPr/>
-        </p:nvSpPr>
-        <p:spPr>
-          <a:xfrm>
-            <a:off x="594360" y="3529584"/>
-            <a:ext cx="11002975" cy="685800"/>
-          </a:xfrm>
-          <a:prstGeom prst="rect">
-            <a:avLst/>
-          </a:prstGeom>
-          <a:noFill/>
-        </p:spPr>
-        <p:txBody>
-          <a:bodyPr wrap="square">
-            <a:spAutoFit/>
-          </a:bodyPr>
-          <a:lstStyle/>
-          <a:p>
-            <a:pPr algn="ctr"/>
-            <a:r>
-              <a:rPr sz="4400" b="1" i="0">
+              <a:rPr sz="4800" b="1" i="0">
                 <a:solidFill>
                   <a:srgbClr val="FFFFFF"/>
                 </a:solidFill>
                 <a:latin typeface="Arial"/>
               </a:rPr>
               <a:t>E as maravilhas do Seu amor</a:t>
-            </a:r>
-          </a:p>
-        </p:txBody>
-      </p:sp>
-      <p:sp>
-        <p:nvSpPr>
-          <p:cNvPr id="5" name="TextBox 4"/>
-          <p:cNvSpPr txBox="1"/>
-          <p:nvPr/>
-        </p:nvSpPr>
-        <p:spPr>
-          <a:xfrm>
-            <a:off x="594360" y="4251960"/>
-            <a:ext cx="11002975" cy="347472"/>
-          </a:xfrm>
-          <a:prstGeom prst="rect">
-            <a:avLst/>
-          </a:prstGeom>
-          <a:noFill/>
-        </p:spPr>
-        <p:txBody>
-          <a:bodyPr wrap="square">
-            <a:spAutoFit/>
-          </a:bodyPr>
-          <a:lstStyle/>
-          <a:p>
-            <a:pPr algn="ctr"/>
-            <a:r>
-              <a:rPr sz="2200" b="0" i="1">
-                <a:solidFill>
-                  <a:srgbClr val="8C8C8C"/>
-                </a:solidFill>
-                <a:latin typeface="Arial"/>
-              </a:rPr>
-              <a:t/>
             </a:r>
           </a:p>
         </p:txBody>
@@ -3953,8 +3603,8 @@
         </p:nvSpPr>
         <p:spPr>
           <a:xfrm>
-            <a:off x="594360" y="1837944"/>
-            <a:ext cx="11002975" cy="685800"/>
+            <a:off x="640080" y="1650492"/>
+            <a:ext cx="10911535" cy="731520"/>
           </a:xfrm>
           <a:prstGeom prst="rect">
             <a:avLst/>
@@ -3969,7 +3619,7 @@
           <a:p>
             <a:pPr algn="ctr"/>
             <a:r>
-              <a:rPr sz="4400" b="1" i="0">
+              <a:rPr sz="4800" b="1" i="0">
                 <a:solidFill>
                   <a:srgbClr val="FFFFFF"/>
                 </a:solidFill>
@@ -3988,8 +3638,8 @@
         </p:nvSpPr>
         <p:spPr>
           <a:xfrm>
-            <a:off x="594360" y="2560320"/>
-            <a:ext cx="11002975" cy="384048"/>
+            <a:off x="640080" y="2418588"/>
+            <a:ext cx="10911535" cy="365760"/>
           </a:xfrm>
           <a:prstGeom prst="rect">
             <a:avLst/>
@@ -4006,7 +3656,7 @@
             <a:r>
               <a:rPr sz="2400" b="0" i="1">
                 <a:solidFill>
-                  <a:srgbClr val="B4B4B4"/>
+                  <a:srgbClr val="AAAAAA"/>
                 </a:solidFill>
                 <a:latin typeface="Arial"/>
               </a:rPr>
@@ -4023,8 +3673,8 @@
         </p:nvSpPr>
         <p:spPr>
           <a:xfrm>
-            <a:off x="594360" y="2980944"/>
-            <a:ext cx="11002975" cy="347472"/>
+            <a:off x="640080" y="2985516"/>
+            <a:ext cx="10911535" cy="731520"/>
           </a:xfrm>
           <a:prstGeom prst="rect">
             <a:avLst/>
@@ -4039,13 +3689,13 @@
           <a:p>
             <a:pPr algn="ctr"/>
             <a:r>
-              <a:rPr sz="2000" b="0" i="1">
-                <a:solidFill>
-                  <a:srgbClr val="8C8C8C"/>
+              <a:rPr sz="4800" b="1" i="0">
+                <a:solidFill>
+                  <a:srgbClr val="FFFFFF"/>
                 </a:solidFill>
                 <a:latin typeface="Arial"/>
               </a:rPr>
-              <a:t/>
+              <a:t>照らしたもう</a:t>
             </a:r>
           </a:p>
         </p:txBody>
@@ -4058,8 +3708,8 @@
         </p:nvSpPr>
         <p:spPr>
           <a:xfrm>
-            <a:off x="594360" y="3529584"/>
-            <a:ext cx="11002975" cy="685800"/>
+            <a:off x="640080" y="3753612"/>
+            <a:ext cx="10911535" cy="365760"/>
           </a:xfrm>
           <a:prstGeom prst="rect">
             <a:avLst/>
@@ -4074,13 +3724,13 @@
           <a:p>
             <a:pPr algn="ctr"/>
             <a:r>
-              <a:rPr sz="4400" b="1" i="0">
-                <a:solidFill>
-                  <a:srgbClr val="FFFFFF"/>
+              <a:rPr sz="2400" b="0" i="1">
+                <a:solidFill>
+                  <a:srgbClr val="AAAAAA"/>
                 </a:solidFill>
                 <a:latin typeface="Arial"/>
               </a:rPr>
-              <a:t>照らしたもう</a:t>
+              <a:t>tera shitamou</a:t>
             </a:r>
           </a:p>
         </p:txBody>
@@ -4093,8 +3743,8 @@
         </p:nvSpPr>
         <p:spPr>
           <a:xfrm>
-            <a:off x="594360" y="4251960"/>
-            <a:ext cx="11002975" cy="384048"/>
+            <a:off x="640080" y="4530852"/>
+            <a:ext cx="10911535" cy="310896"/>
           </a:xfrm>
           <a:prstGeom prst="rect">
             <a:avLst/>
@@ -4109,13 +3759,13 @@
           <a:p>
             <a:pPr algn="ctr"/>
             <a:r>
-              <a:rPr sz="2400" b="0" i="1">
-                <a:solidFill>
-                  <a:srgbClr val="B4B4B4"/>
+              <a:rPr sz="2000" b="0" i="1">
+                <a:solidFill>
+                  <a:srgbClr val="828282"/>
                 </a:solidFill>
                 <a:latin typeface="Arial"/>
               </a:rPr>
-              <a:t>tera shitamou</a:t>
+              <a:t>Alegria ao Mundo</a:t>
             </a:r>
           </a:p>
         </p:txBody>
@@ -4128,8 +3778,8 @@
         </p:nvSpPr>
         <p:spPr>
           <a:xfrm>
-            <a:off x="594360" y="4672584"/>
-            <a:ext cx="11002975" cy="347472"/>
+            <a:off x="640080" y="4896612"/>
+            <a:ext cx="10911535" cy="310896"/>
           </a:xfrm>
           <a:prstGeom prst="rect">
             <a:avLst/>
@@ -4146,11 +3796,11 @@
             <a:r>
               <a:rPr sz="2000" b="0" i="1">
                 <a:solidFill>
-                  <a:srgbClr val="8C8C8C"/>
+                  <a:srgbClr val="828282"/>
                 </a:solidFill>
                 <a:latin typeface="Arial"/>
               </a:rPr>
-              <a:t/>
+              <a:t>Alegria ao mundo! O Senhor vem!</a:t>
             </a:r>
           </a:p>
         </p:txBody>
@@ -4189,8 +3839,8 @@
         </p:nvSpPr>
         <p:spPr>
           <a:xfrm>
-            <a:off x="594360" y="1837944"/>
-            <a:ext cx="11002975" cy="685800"/>
+            <a:off x="640080" y="1650492"/>
+            <a:ext cx="10911535" cy="731520"/>
           </a:xfrm>
           <a:prstGeom prst="rect">
             <a:avLst/>
@@ -4205,7 +3855,7 @@
           <a:p>
             <a:pPr algn="ctr"/>
             <a:r>
-              <a:rPr sz="4400" b="1" i="0">
+              <a:rPr sz="4800" b="1" i="0">
                 <a:solidFill>
                   <a:srgbClr val="FFFFFF"/>
                 </a:solidFill>
@@ -4224,8 +3874,8 @@
         </p:nvSpPr>
         <p:spPr>
           <a:xfrm>
-            <a:off x="594360" y="2560320"/>
-            <a:ext cx="11002975" cy="384048"/>
+            <a:off x="640080" y="2418588"/>
+            <a:ext cx="10911535" cy="365760"/>
           </a:xfrm>
           <a:prstGeom prst="rect">
             <a:avLst/>
@@ -4242,7 +3892,7 @@
             <a:r>
               <a:rPr sz="2400" b="0" i="1">
                 <a:solidFill>
-                  <a:srgbClr val="B4B4B4"/>
+                  <a:srgbClr val="AAAAAA"/>
                 </a:solidFill>
                 <a:latin typeface="Arial"/>
               </a:rPr>
@@ -4259,8 +3909,8 @@
         </p:nvSpPr>
         <p:spPr>
           <a:xfrm>
-            <a:off x="594360" y="2980944"/>
-            <a:ext cx="11002975" cy="347472"/>
+            <a:off x="640080" y="2985516"/>
+            <a:ext cx="10911535" cy="731520"/>
           </a:xfrm>
           <a:prstGeom prst="rect">
             <a:avLst/>
@@ -4275,13 +3925,13 @@
           <a:p>
             <a:pPr algn="ctr"/>
             <a:r>
-              <a:rPr sz="2000" b="0" i="1">
-                <a:solidFill>
-                  <a:srgbClr val="8C8C8C"/>
+              <a:rPr sz="4800" b="1" i="0">
+                <a:solidFill>
+                  <a:srgbClr val="FFFFFF"/>
                 </a:solidFill>
                 <a:latin typeface="Arial"/>
               </a:rPr>
-              <a:t/>
+              <a:t>主は来ませり　主は来ませり</a:t>
             </a:r>
           </a:p>
         </p:txBody>
@@ -4294,8 +3944,8 @@
         </p:nvSpPr>
         <p:spPr>
           <a:xfrm>
-            <a:off x="594360" y="3529584"/>
-            <a:ext cx="11002975" cy="685800"/>
+            <a:off x="640080" y="3753612"/>
+            <a:ext cx="10911535" cy="365760"/>
           </a:xfrm>
           <a:prstGeom prst="rect">
             <a:avLst/>
@@ -4310,13 +3960,13 @@
           <a:p>
             <a:pPr algn="ctr"/>
             <a:r>
-              <a:rPr sz="4400" b="1" i="0">
-                <a:solidFill>
-                  <a:srgbClr val="FFFFFF"/>
+              <a:rPr sz="2400" b="0" i="1">
+                <a:solidFill>
+                  <a:srgbClr val="AAAAAA"/>
                 </a:solidFill>
                 <a:latin typeface="Arial"/>
               </a:rPr>
-              <a:t>主は来ませり　主は来ませり</a:t>
+              <a:t>shu ha kima seri shu ha kima seri</a:t>
             </a:r>
           </a:p>
         </p:txBody>
@@ -4329,8 +3979,8 @@
         </p:nvSpPr>
         <p:spPr>
           <a:xfrm>
-            <a:off x="594360" y="4251960"/>
-            <a:ext cx="11002975" cy="384048"/>
+            <a:off x="640080" y="4530852"/>
+            <a:ext cx="10911535" cy="310896"/>
           </a:xfrm>
           <a:prstGeom prst="rect">
             <a:avLst/>
@@ -4345,13 +3995,13 @@
           <a:p>
             <a:pPr algn="ctr"/>
             <a:r>
-              <a:rPr sz="2400" b="0" i="1">
-                <a:solidFill>
-                  <a:srgbClr val="B4B4B4"/>
+              <a:rPr sz="2000" b="0" i="1">
+                <a:solidFill>
+                  <a:srgbClr val="828282"/>
                 </a:solidFill>
                 <a:latin typeface="Arial"/>
               </a:rPr>
-              <a:t>shu ha kima seri shu ha kima seri</a:t>
+              <a:t>Que a terra o receba</a:t>
             </a:r>
           </a:p>
         </p:txBody>
@@ -4364,8 +4014,8 @@
         </p:nvSpPr>
         <p:spPr>
           <a:xfrm>
-            <a:off x="594360" y="4672584"/>
-            <a:ext cx="11002975" cy="347472"/>
+            <a:off x="640080" y="4896612"/>
+            <a:ext cx="10911535" cy="310896"/>
           </a:xfrm>
           <a:prstGeom prst="rect">
             <a:avLst/>
@@ -4382,11 +4032,11 @@
             <a:r>
               <a:rPr sz="2000" b="0" i="1">
                 <a:solidFill>
-                  <a:srgbClr val="8C8C8C"/>
+                  <a:srgbClr val="828282"/>
                 </a:solidFill>
                 <a:latin typeface="Arial"/>
               </a:rPr>
-              <a:t/>
+              <a:t>Que todo coração lhe prepare morada</a:t>
             </a:r>
           </a:p>
         </p:txBody>
@@ -4425,8 +4075,8 @@
         </p:nvSpPr>
         <p:spPr>
           <a:xfrm>
-            <a:off x="594360" y="2683764"/>
-            <a:ext cx="11002975" cy="685800"/>
+            <a:off x="640080" y="2500884"/>
+            <a:ext cx="10911535" cy="731520"/>
           </a:xfrm>
           <a:prstGeom prst="rect">
             <a:avLst/>
@@ -4441,7 +4091,7 @@
           <a:p>
             <a:pPr algn="ctr"/>
             <a:r>
-              <a:rPr sz="4400" b="1" i="0">
+              <a:rPr sz="4800" b="1" i="0">
                 <a:solidFill>
                   <a:srgbClr val="FFFFFF"/>
                 </a:solidFill>
@@ -4460,8 +4110,8 @@
         </p:nvSpPr>
         <p:spPr>
           <a:xfrm>
-            <a:off x="594360" y="3406140"/>
-            <a:ext cx="11002975" cy="384048"/>
+            <a:off x="640080" y="3268980"/>
+            <a:ext cx="10911535" cy="365760"/>
           </a:xfrm>
           <a:prstGeom prst="rect">
             <a:avLst/>
@@ -4478,7 +4128,7 @@
             <a:r>
               <a:rPr sz="2400" b="0" i="1">
                 <a:solidFill>
-                  <a:srgbClr val="B4B4B4"/>
+                  <a:srgbClr val="AAAAAA"/>
                 </a:solidFill>
                 <a:latin typeface="Arial"/>
               </a:rPr>
@@ -4495,8 +4145,8 @@
         </p:nvSpPr>
         <p:spPr>
           <a:xfrm>
-            <a:off x="594360" y="3826764"/>
-            <a:ext cx="11002975" cy="347472"/>
+            <a:off x="640080" y="4046220"/>
+            <a:ext cx="10911535" cy="310896"/>
           </a:xfrm>
           <a:prstGeom prst="rect">
             <a:avLst/>
@@ -4513,11 +4163,11 @@
             <a:r>
               <a:rPr sz="2000" b="0" i="1">
                 <a:solidFill>
-                  <a:srgbClr val="8C8C8C"/>
+                  <a:srgbClr val="828282"/>
                 </a:solidFill>
                 <a:latin typeface="Arial"/>
               </a:rPr>
-              <a:t/>
+              <a:t>E o céu e a natureza cantam</a:t>
             </a:r>
           </a:p>
         </p:txBody>
@@ -4556,8 +4206,8 @@
         </p:nvSpPr>
         <p:spPr>
           <a:xfrm>
-            <a:off x="594360" y="2258568"/>
-            <a:ext cx="11002975" cy="685800"/>
+            <a:off x="640080" y="2052828"/>
+            <a:ext cx="10911535" cy="731520"/>
           </a:xfrm>
           <a:prstGeom prst="rect">
             <a:avLst/>
@@ -4572,7 +4222,7 @@
           <a:p>
             <a:pPr algn="ctr"/>
             <a:r>
-              <a:rPr sz="4022" b="1" i="0">
+              <a:rPr sz="4300" b="1" i="0">
                 <a:solidFill>
                   <a:srgbClr val="FFFFFF"/>
                 </a:solidFill>
@@ -4591,8 +4241,8 @@
         </p:nvSpPr>
         <p:spPr>
           <a:xfrm>
-            <a:off x="594360" y="2980944"/>
-            <a:ext cx="11002975" cy="347472"/>
+            <a:off x="640080" y="2985516"/>
+            <a:ext cx="10911535" cy="731520"/>
           </a:xfrm>
           <a:prstGeom prst="rect">
             <a:avLst/>
@@ -4607,83 +4257,13 @@
           <a:p>
             <a:pPr algn="ctr"/>
             <a:r>
-              <a:rPr sz="2200" b="0" i="1">
-                <a:solidFill>
-                  <a:srgbClr val="8C8C8C"/>
-                </a:solidFill>
-                <a:latin typeface="Arial"/>
-              </a:rPr>
-              <a:t/>
-            </a:r>
-          </a:p>
-        </p:txBody>
-      </p:sp>
-      <p:sp>
-        <p:nvSpPr>
-          <p:cNvPr id="4" name="TextBox 3"/>
-          <p:cNvSpPr txBox="1"/>
-          <p:nvPr/>
-        </p:nvSpPr>
-        <p:spPr>
-          <a:xfrm>
-            <a:off x="594360" y="3529584"/>
-            <a:ext cx="11002975" cy="685800"/>
-          </a:xfrm>
-          <a:prstGeom prst="rect">
-            <a:avLst/>
-          </a:prstGeom>
-          <a:noFill/>
-        </p:spPr>
-        <p:txBody>
-          <a:bodyPr wrap="square">
-            <a:spAutoFit/>
-          </a:bodyPr>
-          <a:lstStyle/>
-          <a:p>
-            <a:pPr algn="ctr"/>
-            <a:r>
-              <a:rPr sz="3911" b="1" i="0">
+              <a:rPr sz="4200" b="1" i="0">
                 <a:solidFill>
                   <a:srgbClr val="FFFFFF"/>
                 </a:solidFill>
                 <a:latin typeface="Arial"/>
               </a:rPr>
               <a:t>Que os homens suas canções empreguem</a:t>
-            </a:r>
-          </a:p>
-        </p:txBody>
-      </p:sp>
-      <p:sp>
-        <p:nvSpPr>
-          <p:cNvPr id="5" name="TextBox 4"/>
-          <p:cNvSpPr txBox="1"/>
-          <p:nvPr/>
-        </p:nvSpPr>
-        <p:spPr>
-          <a:xfrm>
-            <a:off x="594360" y="4251960"/>
-            <a:ext cx="11002975" cy="347472"/>
-          </a:xfrm>
-          <a:prstGeom prst="rect">
-            <a:avLst/>
-          </a:prstGeom>
-          <a:noFill/>
-        </p:spPr>
-        <p:txBody>
-          <a:bodyPr wrap="square">
-            <a:spAutoFit/>
-          </a:bodyPr>
-          <a:lstStyle/>
-          <a:p>
-            <a:pPr algn="ctr"/>
-            <a:r>
-              <a:rPr sz="2200" b="0" i="1">
-                <a:solidFill>
-                  <a:srgbClr val="8C8C8C"/>
-                </a:solidFill>
-                <a:latin typeface="Arial"/>
-              </a:rPr>
-              <a:t/>
             </a:r>
           </a:p>
         </p:txBody>
@@ -4722,8 +4302,8 @@
         </p:nvSpPr>
         <p:spPr>
           <a:xfrm>
-            <a:off x="594360" y="2258568"/>
-            <a:ext cx="11002975" cy="685800"/>
+            <a:off x="640080" y="2052828"/>
+            <a:ext cx="10911535" cy="731520"/>
           </a:xfrm>
           <a:prstGeom prst="rect">
             <a:avLst/>
@@ -4738,7 +4318,7 @@
           <a:p>
             <a:pPr algn="ctr"/>
             <a:r>
-              <a:rPr sz="2760" b="1" i="0">
+              <a:rPr sz="3000" b="1" i="0">
                 <a:solidFill>
                   <a:srgbClr val="FFFFFF"/>
                 </a:solidFill>
@@ -4757,8 +4337,8 @@
         </p:nvSpPr>
         <p:spPr>
           <a:xfrm>
-            <a:off x="594360" y="2980944"/>
-            <a:ext cx="11002975" cy="347472"/>
+            <a:off x="640080" y="2985516"/>
+            <a:ext cx="10911535" cy="731520"/>
           </a:xfrm>
           <a:prstGeom prst="rect">
             <a:avLst/>
@@ -4773,83 +4353,13 @@
           <a:p>
             <a:pPr algn="ctr"/>
             <a:r>
-              <a:rPr sz="2200" b="0" i="1">
-                <a:solidFill>
-                  <a:srgbClr val="8C8C8C"/>
-                </a:solidFill>
-                <a:latin typeface="Arial"/>
-              </a:rPr>
-              <a:t/>
-            </a:r>
-          </a:p>
-        </p:txBody>
-      </p:sp>
-      <p:sp>
-        <p:nvSpPr>
-          <p:cNvPr id="4" name="TextBox 3"/>
-          <p:cNvSpPr txBox="1"/>
-          <p:nvPr/>
-        </p:nvSpPr>
-        <p:spPr>
-          <a:xfrm>
-            <a:off x="594360" y="3529584"/>
-            <a:ext cx="11002975" cy="685800"/>
-          </a:xfrm>
-          <a:prstGeom prst="rect">
-            <a:avLst/>
-          </a:prstGeom>
-          <a:noFill/>
-        </p:spPr>
-        <p:txBody>
-          <a:bodyPr wrap="square">
-            <a:spAutoFit/>
-          </a:bodyPr>
-          <a:lstStyle/>
-          <a:p>
-            <a:pPr algn="ctr"/>
-            <a:r>
-              <a:rPr sz="4400" b="1" i="0">
+              <a:rPr sz="4800" b="1" i="0">
                 <a:solidFill>
                   <a:srgbClr val="FFFFFF"/>
                 </a:solidFill>
                 <a:latin typeface="Arial"/>
               </a:rPr>
               <a:t>Repetem o júbilo que ressoa</a:t>
-            </a:r>
-          </a:p>
-        </p:txBody>
-      </p:sp>
-      <p:sp>
-        <p:nvSpPr>
-          <p:cNvPr id="5" name="TextBox 4"/>
-          <p:cNvSpPr txBox="1"/>
-          <p:nvPr/>
-        </p:nvSpPr>
-        <p:spPr>
-          <a:xfrm>
-            <a:off x="594360" y="4251960"/>
-            <a:ext cx="11002975" cy="347472"/>
-          </a:xfrm>
-          <a:prstGeom prst="rect">
-            <a:avLst/>
-          </a:prstGeom>
-          <a:noFill/>
-        </p:spPr>
-        <p:txBody>
-          <a:bodyPr wrap="square">
-            <a:spAutoFit/>
-          </a:bodyPr>
-          <a:lstStyle/>
-          <a:p>
-            <a:pPr algn="ctr"/>
-            <a:r>
-              <a:rPr sz="2200" b="0" i="1">
-                <a:solidFill>
-                  <a:srgbClr val="8C8C8C"/>
-                </a:solidFill>
-                <a:latin typeface="Arial"/>
-              </a:rPr>
-              <a:t/>
             </a:r>
           </a:p>
         </p:txBody>
@@ -4888,8 +4398,8 @@
         </p:nvSpPr>
         <p:spPr>
           <a:xfrm>
-            <a:off x="594360" y="2258568"/>
-            <a:ext cx="11002975" cy="685800"/>
+            <a:off x="640080" y="2052828"/>
+            <a:ext cx="10911535" cy="731520"/>
           </a:xfrm>
           <a:prstGeom prst="rect">
             <a:avLst/>
@@ -4904,7 +4414,7 @@
           <a:p>
             <a:pPr algn="ctr"/>
             <a:r>
-              <a:rPr sz="3610" b="1" i="0">
+              <a:rPr sz="3900" b="1" i="0">
                 <a:solidFill>
                   <a:srgbClr val="FFFFFF"/>
                 </a:solidFill>
@@ -4923,8 +4433,8 @@
         </p:nvSpPr>
         <p:spPr>
           <a:xfrm>
-            <a:off x="594360" y="2980944"/>
-            <a:ext cx="11002975" cy="347472"/>
+            <a:off x="640080" y="2985516"/>
+            <a:ext cx="10911535" cy="731520"/>
           </a:xfrm>
           <a:prstGeom prst="rect">
             <a:avLst/>
@@ -4939,83 +4449,13 @@
           <a:p>
             <a:pPr algn="ctr"/>
             <a:r>
-              <a:rPr sz="2200" b="0" i="1">
-                <a:solidFill>
-                  <a:srgbClr val="8C8C8C"/>
-                </a:solidFill>
-                <a:latin typeface="Arial"/>
-              </a:rPr>
-              <a:t/>
-            </a:r>
-          </a:p>
-        </p:txBody>
-      </p:sp>
-      <p:sp>
-        <p:nvSpPr>
-          <p:cNvPr id="4" name="TextBox 3"/>
-          <p:cNvSpPr txBox="1"/>
-          <p:nvPr/>
-        </p:nvSpPr>
-        <p:spPr>
-          <a:xfrm>
-            <a:off x="594360" y="3529584"/>
-            <a:ext cx="11002975" cy="685800"/>
-          </a:xfrm>
-          <a:prstGeom prst="rect">
-            <a:avLst/>
-          </a:prstGeom>
-          <a:noFill/>
-        </p:spPr>
-        <p:txBody>
-          <a:bodyPr wrap="square">
-            <a:spAutoFit/>
-          </a:bodyPr>
-          <a:lstStyle/>
-          <a:p>
-            <a:pPr algn="ctr"/>
-            <a:r>
-              <a:rPr sz="3610" b="1" i="0">
+              <a:rPr sz="3900" b="1" i="0">
                 <a:solidFill>
                   <a:srgbClr val="FFFFFF"/>
                 </a:solidFill>
                 <a:latin typeface="Arial"/>
               </a:rPr>
               <a:t>E as maravilhas, maravilhas do Seu amor</a:t>
-            </a:r>
-          </a:p>
-        </p:txBody>
-      </p:sp>
-      <p:sp>
-        <p:nvSpPr>
-          <p:cNvPr id="5" name="TextBox 4"/>
-          <p:cNvSpPr txBox="1"/>
-          <p:nvPr/>
-        </p:nvSpPr>
-        <p:spPr>
-          <a:xfrm>
-            <a:off x="594360" y="4251960"/>
-            <a:ext cx="11002975" cy="347472"/>
-          </a:xfrm>
-          <a:prstGeom prst="rect">
-            <a:avLst/>
-          </a:prstGeom>
-          <a:noFill/>
-        </p:spPr>
-        <p:txBody>
-          <a:bodyPr wrap="square">
-            <a:spAutoFit/>
-          </a:bodyPr>
-          <a:lstStyle/>
-          <a:p>
-            <a:pPr algn="ctr"/>
-            <a:r>
-              <a:rPr sz="2200" b="0" i="1">
-                <a:solidFill>
-                  <a:srgbClr val="8C8C8C"/>
-                </a:solidFill>
-                <a:latin typeface="Arial"/>
-              </a:rPr>
-              <a:t/>
             </a:r>
           </a:p>
         </p:txBody>
@@ -5054,8 +4494,8 @@
         </p:nvSpPr>
         <p:spPr>
           <a:xfrm>
-            <a:off x="594360" y="2258568"/>
-            <a:ext cx="11002975" cy="685800"/>
+            <a:off x="640080" y="2052828"/>
+            <a:ext cx="10911535" cy="731520"/>
           </a:xfrm>
           <a:prstGeom prst="rect">
             <a:avLst/>
@@ -5070,7 +4510,7 @@
           <a:p>
             <a:pPr algn="ctr"/>
             <a:r>
-              <a:rPr sz="4400" b="1" i="0">
+              <a:rPr sz="4800" b="1" i="0">
                 <a:solidFill>
                   <a:srgbClr val="FFFFFF"/>
                 </a:solidFill>
@@ -5089,8 +4529,8 @@
         </p:nvSpPr>
         <p:spPr>
           <a:xfrm>
-            <a:off x="594360" y="2980944"/>
-            <a:ext cx="11002975" cy="347472"/>
+            <a:off x="640080" y="2985516"/>
+            <a:ext cx="10911535" cy="731520"/>
           </a:xfrm>
           <a:prstGeom prst="rect">
             <a:avLst/>
@@ -5105,83 +4545,13 @@
           <a:p>
             <a:pPr algn="ctr"/>
             <a:r>
-              <a:rPr sz="2200" b="0" i="1">
-                <a:solidFill>
-                  <a:srgbClr val="8C8C8C"/>
-                </a:solidFill>
-                <a:latin typeface="Arial"/>
-              </a:rPr>
-              <a:t/>
-            </a:r>
-          </a:p>
-        </p:txBody>
-      </p:sp>
-      <p:sp>
-        <p:nvSpPr>
-          <p:cNvPr id="4" name="TextBox 3"/>
-          <p:cNvSpPr txBox="1"/>
-          <p:nvPr/>
-        </p:nvSpPr>
-        <p:spPr>
-          <a:xfrm>
-            <a:off x="594360" y="3529584"/>
-            <a:ext cx="11002975" cy="685800"/>
-          </a:xfrm>
-          <a:prstGeom prst="rect">
-            <a:avLst/>
-          </a:prstGeom>
-          <a:noFill/>
-        </p:spPr>
-        <p:txBody>
-          <a:bodyPr wrap="square">
-            <a:spAutoFit/>
-          </a:bodyPr>
-          <a:lstStyle/>
-          <a:p>
-            <a:pPr algn="ctr"/>
-            <a:r>
-              <a:rPr sz="4022" b="1" i="0">
+              <a:rPr sz="4300" b="1" i="0">
                 <a:solidFill>
                   <a:srgbClr val="FFFFFF"/>
                 </a:solidFill>
                 <a:latin typeface="Arial"/>
               </a:rPr>
               <a:t>Que todo coração lhe prepare morada</a:t>
-            </a:r>
-          </a:p>
-        </p:txBody>
-      </p:sp>
-      <p:sp>
-        <p:nvSpPr>
-          <p:cNvPr id="5" name="TextBox 4"/>
-          <p:cNvSpPr txBox="1"/>
-          <p:nvPr/>
-        </p:nvSpPr>
-        <p:spPr>
-          <a:xfrm>
-            <a:off x="594360" y="4251960"/>
-            <a:ext cx="11002975" cy="347472"/>
-          </a:xfrm>
-          <a:prstGeom prst="rect">
-            <a:avLst/>
-          </a:prstGeom>
-          <a:noFill/>
-        </p:spPr>
-        <p:txBody>
-          <a:bodyPr wrap="square">
-            <a:spAutoFit/>
-          </a:bodyPr>
-          <a:lstStyle/>
-          <a:p>
-            <a:pPr algn="ctr"/>
-            <a:r>
-              <a:rPr sz="2200" b="0" i="1">
-                <a:solidFill>
-                  <a:srgbClr val="8C8C8C"/>
-                </a:solidFill>
-                <a:latin typeface="Arial"/>
-              </a:rPr>
-              <a:t/>
             </a:r>
           </a:p>
         </p:txBody>
@@ -5220,8 +4590,8 @@
         </p:nvSpPr>
         <p:spPr>
           <a:xfrm>
-            <a:off x="594360" y="2258568"/>
-            <a:ext cx="11002975" cy="685800"/>
+            <a:off x="640080" y="2052828"/>
+            <a:ext cx="10911535" cy="731520"/>
           </a:xfrm>
           <a:prstGeom prst="rect">
             <a:avLst/>
@@ -5236,7 +4606,7 @@
           <a:p>
             <a:pPr algn="ctr"/>
             <a:r>
-              <a:rPr sz="3610" b="1" i="0">
+              <a:rPr sz="3900" b="1" i="0">
                 <a:solidFill>
                   <a:srgbClr val="FFFFFF"/>
                 </a:solidFill>
@@ -5255,8 +4625,8 @@
         </p:nvSpPr>
         <p:spPr>
           <a:xfrm>
-            <a:off x="594360" y="2980944"/>
-            <a:ext cx="11002975" cy="347472"/>
+            <a:off x="640080" y="2985516"/>
+            <a:ext cx="10911535" cy="731520"/>
           </a:xfrm>
           <a:prstGeom prst="rect">
             <a:avLst/>
@@ -5271,83 +4641,13 @@
           <a:p>
             <a:pPr algn="ctr"/>
             <a:r>
-              <a:rPr sz="2200" b="0" i="1">
-                <a:solidFill>
-                  <a:srgbClr val="8C8C8C"/>
-                </a:solidFill>
-                <a:latin typeface="Arial"/>
-              </a:rPr>
-              <a:t/>
-            </a:r>
-          </a:p>
-        </p:txBody>
-      </p:sp>
-      <p:sp>
-        <p:nvSpPr>
-          <p:cNvPr id="4" name="TextBox 3"/>
-          <p:cNvSpPr txBox="1"/>
-          <p:nvPr/>
-        </p:nvSpPr>
-        <p:spPr>
-          <a:xfrm>
-            <a:off x="594360" y="3529584"/>
-            <a:ext cx="11002975" cy="685800"/>
-          </a:xfrm>
-          <a:prstGeom prst="rect">
-            <a:avLst/>
-          </a:prstGeom>
-          <a:noFill/>
-        </p:spPr>
-        <p:txBody>
-          <a:bodyPr wrap="square">
-            <a:spAutoFit/>
-          </a:bodyPr>
-          <a:lstStyle/>
-          <a:p>
-            <a:pPr algn="ctr"/>
-            <a:r>
-              <a:rPr sz="3610" b="1" i="0">
+              <a:rPr sz="3900" b="1" i="0">
                 <a:solidFill>
                   <a:srgbClr val="FFFFFF"/>
                 </a:solidFill>
                 <a:latin typeface="Arial"/>
               </a:rPr>
               <a:t>E as maravilhas, maravilhas do Seu amor</a:t>
-            </a:r>
-          </a:p>
-        </p:txBody>
-      </p:sp>
-      <p:sp>
-        <p:nvSpPr>
-          <p:cNvPr id="5" name="TextBox 4"/>
-          <p:cNvSpPr txBox="1"/>
-          <p:nvPr/>
-        </p:nvSpPr>
-        <p:spPr>
-          <a:xfrm>
-            <a:off x="594360" y="4251960"/>
-            <a:ext cx="11002975" cy="347472"/>
-          </a:xfrm>
-          <a:prstGeom prst="rect">
-            <a:avLst/>
-          </a:prstGeom>
-          <a:noFill/>
-        </p:spPr>
-        <p:txBody>
-          <a:bodyPr wrap="square">
-            <a:spAutoFit/>
-          </a:bodyPr>
-          <a:lstStyle/>
-          <a:p>
-            <a:pPr algn="ctr"/>
-            <a:r>
-              <a:rPr sz="2200" b="0" i="1">
-                <a:solidFill>
-                  <a:srgbClr val="8C8C8C"/>
-                </a:solidFill>
-                <a:latin typeface="Arial"/>
-              </a:rPr>
-              <a:t/>
             </a:r>
           </a:p>
         </p:txBody>
@@ -5386,8 +4686,8 @@
         </p:nvSpPr>
         <p:spPr>
           <a:xfrm>
-            <a:off x="594360" y="2258568"/>
-            <a:ext cx="11002975" cy="685800"/>
+            <a:off x="640080" y="2052828"/>
+            <a:ext cx="10911535" cy="731520"/>
           </a:xfrm>
           <a:prstGeom prst="rect">
             <a:avLst/>
@@ -5402,7 +4702,7 @@
           <a:p>
             <a:pPr algn="ctr"/>
             <a:r>
-              <a:rPr sz="4400" b="1" i="0">
+              <a:rPr sz="4800" b="1" i="0">
                 <a:solidFill>
                   <a:srgbClr val="FFFFFF"/>
                 </a:solidFill>
@@ -5421,8 +4721,8 @@
         </p:nvSpPr>
         <p:spPr>
           <a:xfrm>
-            <a:off x="594360" y="2980944"/>
-            <a:ext cx="11002975" cy="347472"/>
+            <a:off x="640080" y="2985516"/>
+            <a:ext cx="10911535" cy="731520"/>
           </a:xfrm>
           <a:prstGeom prst="rect">
             <a:avLst/>
@@ -5437,83 +4737,13 @@
           <a:p>
             <a:pPr algn="ctr"/>
             <a:r>
-              <a:rPr sz="2200" b="0" i="1">
-                <a:solidFill>
-                  <a:srgbClr val="8C8C8C"/>
-                </a:solidFill>
-                <a:latin typeface="Arial"/>
-              </a:rPr>
-              <a:t/>
-            </a:r>
-          </a:p>
-        </p:txBody>
-      </p:sp>
-      <p:sp>
-        <p:nvSpPr>
-          <p:cNvPr id="4" name="TextBox 3"/>
-          <p:cNvSpPr txBox="1"/>
-          <p:nvPr/>
-        </p:nvSpPr>
-        <p:spPr>
-          <a:xfrm>
-            <a:off x="594360" y="3529584"/>
-            <a:ext cx="11002975" cy="685800"/>
-          </a:xfrm>
-          <a:prstGeom prst="rect">
-            <a:avLst/>
-          </a:prstGeom>
-          <a:noFill/>
-        </p:spPr>
-        <p:txBody>
-          <a:bodyPr wrap="square">
-            <a:spAutoFit/>
-          </a:bodyPr>
-          <a:lstStyle/>
-          <a:p>
-            <a:pPr algn="ctr"/>
-            <a:r>
-              <a:rPr sz="4400" b="1" i="0">
+              <a:rPr sz="4800" b="1" i="0">
                 <a:solidFill>
                   <a:srgbClr val="FFFFFF"/>
                 </a:solidFill>
                 <a:latin typeface="Arial"/>
               </a:rPr>
               <a:t>E o céu e a natureza cantam</a:t>
-            </a:r>
-          </a:p>
-        </p:txBody>
-      </p:sp>
-      <p:sp>
-        <p:nvSpPr>
-          <p:cNvPr id="5" name="TextBox 4"/>
-          <p:cNvSpPr txBox="1"/>
-          <p:nvPr/>
-        </p:nvSpPr>
-        <p:spPr>
-          <a:xfrm>
-            <a:off x="594360" y="4251960"/>
-            <a:ext cx="11002975" cy="347472"/>
-          </a:xfrm>
-          <a:prstGeom prst="rect">
-            <a:avLst/>
-          </a:prstGeom>
-          <a:noFill/>
-        </p:spPr>
-        <p:txBody>
-          <a:bodyPr wrap="square">
-            <a:spAutoFit/>
-          </a:bodyPr>
-          <a:lstStyle/>
-          <a:p>
-            <a:pPr algn="ctr"/>
-            <a:r>
-              <a:rPr sz="2200" b="0" i="1">
-                <a:solidFill>
-                  <a:srgbClr val="8C8C8C"/>
-                </a:solidFill>
-                <a:latin typeface="Arial"/>
-              </a:rPr>
-              <a:t/>
             </a:r>
           </a:p>
         </p:txBody>
@@ -5552,8 +4782,8 @@
         </p:nvSpPr>
         <p:spPr>
           <a:xfrm>
-            <a:off x="594360" y="1837944"/>
-            <a:ext cx="11002975" cy="685800"/>
+            <a:off x="640080" y="1650492"/>
+            <a:ext cx="10911535" cy="731520"/>
           </a:xfrm>
           <a:prstGeom prst="rect">
             <a:avLst/>
@@ -5568,7 +4798,7 @@
           <a:p>
             <a:pPr algn="ctr"/>
             <a:r>
-              <a:rPr sz="4400" b="1" i="0">
+              <a:rPr sz="4800" b="1" i="0">
                 <a:solidFill>
                   <a:srgbClr val="FFFFFF"/>
                 </a:solidFill>
@@ -5587,8 +4817,8 @@
         </p:nvSpPr>
         <p:spPr>
           <a:xfrm>
-            <a:off x="594360" y="2560320"/>
-            <a:ext cx="11002975" cy="384048"/>
+            <a:off x="640080" y="2418588"/>
+            <a:ext cx="10911535" cy="365760"/>
           </a:xfrm>
           <a:prstGeom prst="rect">
             <a:avLst/>
@@ -5605,7 +4835,7 @@
             <a:r>
               <a:rPr sz="2400" b="0" i="1">
                 <a:solidFill>
-                  <a:srgbClr val="B4B4B4"/>
+                  <a:srgbClr val="AAAAAA"/>
                 </a:solidFill>
                 <a:latin typeface="Arial"/>
               </a:rPr>
@@ -5622,8 +4852,8 @@
         </p:nvSpPr>
         <p:spPr>
           <a:xfrm>
-            <a:off x="594360" y="2980944"/>
-            <a:ext cx="11002975" cy="347472"/>
+            <a:off x="640080" y="2985516"/>
+            <a:ext cx="10911535" cy="731520"/>
           </a:xfrm>
           <a:prstGeom prst="rect">
             <a:avLst/>
@@ -5638,13 +4868,13 @@
           <a:p>
             <a:pPr algn="ctr"/>
             <a:r>
-              <a:rPr sz="2000" b="0" i="1">
-                <a:solidFill>
-                  <a:srgbClr val="8C8C8C"/>
+              <a:rPr sz="4800" b="1" i="0">
+                <a:solidFill>
+                  <a:srgbClr val="FFFFFF"/>
                 </a:solidFill>
                 <a:latin typeface="Arial"/>
               </a:rPr>
-              <a:t/>
+              <a:t>迎えまつれ</a:t>
             </a:r>
           </a:p>
         </p:txBody>
@@ -5657,8 +4887,8 @@
         </p:nvSpPr>
         <p:spPr>
           <a:xfrm>
-            <a:off x="594360" y="3529584"/>
-            <a:ext cx="11002975" cy="685800"/>
+            <a:off x="640080" y="3753612"/>
+            <a:ext cx="10911535" cy="365760"/>
           </a:xfrm>
           <a:prstGeom prst="rect">
             <a:avLst/>
@@ -5673,13 +4903,13 @@
           <a:p>
             <a:pPr algn="ctr"/>
             <a:r>
-              <a:rPr sz="4400" b="1" i="0">
-                <a:solidFill>
-                  <a:srgbClr val="FFFFFF"/>
+              <a:rPr sz="2400" b="0" i="1">
+                <a:solidFill>
+                  <a:srgbClr val="AAAAAA"/>
                 </a:solidFill>
                 <a:latin typeface="Arial"/>
               </a:rPr>
-              <a:t>迎えまつれ</a:t>
+              <a:t>mukae matsure</a:t>
             </a:r>
           </a:p>
         </p:txBody>
@@ -5692,8 +4922,8 @@
         </p:nvSpPr>
         <p:spPr>
           <a:xfrm>
-            <a:off x="594360" y="4251960"/>
-            <a:ext cx="11002975" cy="384048"/>
+            <a:off x="640080" y="4530852"/>
+            <a:ext cx="10911535" cy="310896"/>
           </a:xfrm>
           <a:prstGeom prst="rect">
             <a:avLst/>
@@ -5708,13 +4938,13 @@
           <a:p>
             <a:pPr algn="ctr"/>
             <a:r>
-              <a:rPr sz="2400" b="0" i="1">
-                <a:solidFill>
-                  <a:srgbClr val="B4B4B4"/>
+              <a:rPr sz="2000" b="0" i="1">
+                <a:solidFill>
+                  <a:srgbClr val="828282"/>
                 </a:solidFill>
                 <a:latin typeface="Arial"/>
               </a:rPr>
-              <a:t>mukae matsure</a:t>
+              <a:t>Alegria ao Mundo</a:t>
             </a:r>
           </a:p>
         </p:txBody>
@@ -5727,8 +4957,8 @@
         </p:nvSpPr>
         <p:spPr>
           <a:xfrm>
-            <a:off x="594360" y="4672584"/>
-            <a:ext cx="11002975" cy="347472"/>
+            <a:off x="640080" y="4896612"/>
+            <a:ext cx="10911535" cy="310896"/>
           </a:xfrm>
           <a:prstGeom prst="rect">
             <a:avLst/>
@@ -5745,11 +4975,11 @@
             <a:r>
               <a:rPr sz="2000" b="0" i="1">
                 <a:solidFill>
-                  <a:srgbClr val="8C8C8C"/>
+                  <a:srgbClr val="828282"/>
                 </a:solidFill>
                 <a:latin typeface="Arial"/>
               </a:rPr>
-              <a:t/>
+              <a:t>Alegria ao mundo! O Senhor vem!</a:t>
             </a:r>
           </a:p>
         </p:txBody>
@@ -5788,8 +5018,8 @@
         </p:nvSpPr>
         <p:spPr>
           <a:xfrm>
-            <a:off x="594360" y="1837944"/>
-            <a:ext cx="11002975" cy="685800"/>
+            <a:off x="640080" y="1650492"/>
+            <a:ext cx="10911535" cy="731520"/>
           </a:xfrm>
           <a:prstGeom prst="rect">
             <a:avLst/>
@@ -5804,7 +5034,7 @@
           <a:p>
             <a:pPr algn="ctr"/>
             <a:r>
-              <a:rPr sz="4400" b="1" i="0">
+              <a:rPr sz="4800" b="1" i="0">
                 <a:solidFill>
                   <a:srgbClr val="FFFFFF"/>
                 </a:solidFill>
@@ -5823,8 +5053,8 @@
         </p:nvSpPr>
         <p:spPr>
           <a:xfrm>
-            <a:off x="594360" y="2560320"/>
-            <a:ext cx="11002975" cy="384048"/>
+            <a:off x="640080" y="2418588"/>
+            <a:ext cx="10911535" cy="365760"/>
           </a:xfrm>
           <a:prstGeom prst="rect">
             <a:avLst/>
@@ -5841,7 +5071,7 @@
             <a:r>
               <a:rPr sz="2400" b="0" i="1">
                 <a:solidFill>
-                  <a:srgbClr val="B4B4B4"/>
+                  <a:srgbClr val="AAAAAA"/>
                 </a:solidFill>
                 <a:latin typeface="Arial"/>
               </a:rPr>
@@ -5858,8 +5088,8 @@
         </p:nvSpPr>
         <p:spPr>
           <a:xfrm>
-            <a:off x="594360" y="2980944"/>
-            <a:ext cx="11002975" cy="347472"/>
+            <a:off x="640080" y="2985516"/>
+            <a:ext cx="10911535" cy="731520"/>
           </a:xfrm>
           <a:prstGeom prst="rect">
             <a:avLst/>
@@ -5874,13 +5104,13 @@
           <a:p>
             <a:pPr algn="ctr"/>
             <a:r>
-              <a:rPr sz="2000" b="0" i="1">
-                <a:solidFill>
-                  <a:srgbClr val="8C8C8C"/>
+              <a:rPr sz="4800" b="1" i="0">
+                <a:solidFill>
+                  <a:srgbClr val="FFFFFF"/>
                 </a:solidFill>
                 <a:latin typeface="Arial"/>
               </a:rPr>
-              <a:t/>
+              <a:t>主は来ませり</a:t>
             </a:r>
           </a:p>
         </p:txBody>
@@ -5893,8 +5123,8 @@
         </p:nvSpPr>
         <p:spPr>
           <a:xfrm>
-            <a:off x="594360" y="3529584"/>
-            <a:ext cx="11002975" cy="685800"/>
+            <a:off x="640080" y="3753612"/>
+            <a:ext cx="10911535" cy="365760"/>
           </a:xfrm>
           <a:prstGeom prst="rect">
             <a:avLst/>
@@ -5909,13 +5139,13 @@
           <a:p>
             <a:pPr algn="ctr"/>
             <a:r>
-              <a:rPr sz="4400" b="1" i="0">
-                <a:solidFill>
-                  <a:srgbClr val="FFFFFF"/>
+              <a:rPr sz="2400" b="0" i="1">
+                <a:solidFill>
+                  <a:srgbClr val="AAAAAA"/>
                 </a:solidFill>
                 <a:latin typeface="Arial"/>
               </a:rPr>
-              <a:t>主は来ませり</a:t>
+              <a:t>shu wa kimaseri</a:t>
             </a:r>
           </a:p>
         </p:txBody>
@@ -5928,8 +5158,8 @@
         </p:nvSpPr>
         <p:spPr>
           <a:xfrm>
-            <a:off x="594360" y="4251960"/>
-            <a:ext cx="11002975" cy="384048"/>
+            <a:off x="640080" y="4530852"/>
+            <a:ext cx="10911535" cy="310896"/>
           </a:xfrm>
           <a:prstGeom prst="rect">
             <a:avLst/>
@@ -5944,13 +5174,13 @@
           <a:p>
             <a:pPr algn="ctr"/>
             <a:r>
-              <a:rPr sz="2400" b="0" i="1">
-                <a:solidFill>
-                  <a:srgbClr val="B4B4B4"/>
+              <a:rPr sz="2000" b="0" i="1">
+                <a:solidFill>
+                  <a:srgbClr val="828282"/>
                 </a:solidFill>
                 <a:latin typeface="Arial"/>
               </a:rPr>
-              <a:t>shu wa kimaseri</a:t>
+              <a:t>Que a terra o receba</a:t>
             </a:r>
           </a:p>
         </p:txBody>
@@ -5963,8 +5193,8 @@
         </p:nvSpPr>
         <p:spPr>
           <a:xfrm>
-            <a:off x="594360" y="4672584"/>
-            <a:ext cx="11002975" cy="347472"/>
+            <a:off x="640080" y="4896612"/>
+            <a:ext cx="10911535" cy="310896"/>
           </a:xfrm>
           <a:prstGeom prst="rect">
             <a:avLst/>
@@ -5981,11 +5211,11 @@
             <a:r>
               <a:rPr sz="2000" b="0" i="1">
                 <a:solidFill>
-                  <a:srgbClr val="8C8C8C"/>
+                  <a:srgbClr val="828282"/>
                 </a:solidFill>
                 <a:latin typeface="Arial"/>
               </a:rPr>
-              <a:t/>
+              <a:t>Que todo coração lhe prepare morada</a:t>
             </a:r>
           </a:p>
         </p:txBody>
@@ -6024,8 +5254,8 @@
         </p:nvSpPr>
         <p:spPr>
           <a:xfrm>
-            <a:off x="594360" y="1837944"/>
-            <a:ext cx="11002975" cy="685800"/>
+            <a:off x="640080" y="1650492"/>
+            <a:ext cx="10911535" cy="731520"/>
           </a:xfrm>
           <a:prstGeom prst="rect">
             <a:avLst/>
@@ -6040,7 +5270,7 @@
           <a:p>
             <a:pPr algn="ctr"/>
             <a:r>
-              <a:rPr sz="4400" b="1" i="0">
+              <a:rPr sz="4800" b="1" i="0">
                 <a:solidFill>
                   <a:srgbClr val="FFFFFF"/>
                 </a:solidFill>
@@ -6059,8 +5289,8 @@
         </p:nvSpPr>
         <p:spPr>
           <a:xfrm>
-            <a:off x="594360" y="2560320"/>
-            <a:ext cx="11002975" cy="384048"/>
+            <a:off x="640080" y="2418588"/>
+            <a:ext cx="10911535" cy="365760"/>
           </a:xfrm>
           <a:prstGeom prst="rect">
             <a:avLst/>
@@ -6077,7 +5307,7 @@
             <a:r>
               <a:rPr sz="2400" b="0" i="1">
                 <a:solidFill>
-                  <a:srgbClr val="B4B4B4"/>
+                  <a:srgbClr val="AAAAAA"/>
                 </a:solidFill>
                 <a:latin typeface="Arial"/>
               </a:rPr>
@@ -6094,8 +5324,8 @@
         </p:nvSpPr>
         <p:spPr>
           <a:xfrm>
-            <a:off x="594360" y="2980944"/>
-            <a:ext cx="11002975" cy="347472"/>
+            <a:off x="640080" y="2985516"/>
+            <a:ext cx="10911535" cy="731520"/>
           </a:xfrm>
           <a:prstGeom prst="rect">
             <a:avLst/>
@@ -6110,13 +5340,13 @@
           <a:p>
             <a:pPr algn="ctr"/>
             <a:r>
-              <a:rPr sz="2000" b="0" i="1">
-                <a:solidFill>
-                  <a:srgbClr val="8C8C8C"/>
+              <a:rPr sz="4800" b="1" i="0">
+                <a:solidFill>
+                  <a:srgbClr val="FFFFFF"/>
                 </a:solidFill>
                 <a:latin typeface="Arial"/>
               </a:rPr>
-              <a:t/>
+              <a:t>主は、 主は   来ませり</a:t>
             </a:r>
           </a:p>
         </p:txBody>
@@ -6129,8 +5359,8 @@
         </p:nvSpPr>
         <p:spPr>
           <a:xfrm>
-            <a:off x="594360" y="3529584"/>
-            <a:ext cx="11002975" cy="685800"/>
+            <a:off x="640080" y="3753612"/>
+            <a:ext cx="10911535" cy="365760"/>
           </a:xfrm>
           <a:prstGeom prst="rect">
             <a:avLst/>
@@ -6145,13 +5375,13 @@
           <a:p>
             <a:pPr algn="ctr"/>
             <a:r>
-              <a:rPr sz="4400" b="1" i="0">
-                <a:solidFill>
-                  <a:srgbClr val="FFFFFF"/>
+              <a:rPr sz="2400" b="0" i="1">
+                <a:solidFill>
+                  <a:srgbClr val="AAAAAA"/>
                 </a:solidFill>
                 <a:latin typeface="Arial"/>
               </a:rPr>
-              <a:t>主は、 主は   来ませり</a:t>
+              <a:t>Interlude</a:t>
             </a:r>
           </a:p>
         </p:txBody>
@@ -6164,8 +5394,8 @@
         </p:nvSpPr>
         <p:spPr>
           <a:xfrm>
-            <a:off x="594360" y="4251960"/>
-            <a:ext cx="11002975" cy="384048"/>
+            <a:off x="640080" y="4530852"/>
+            <a:ext cx="10911535" cy="310896"/>
           </a:xfrm>
           <a:prstGeom prst="rect">
             <a:avLst/>
@@ -6180,13 +5410,13 @@
           <a:p>
             <a:pPr algn="ctr"/>
             <a:r>
-              <a:rPr sz="2400" b="0" i="1">
-                <a:solidFill>
-                  <a:srgbClr val="B4B4B4"/>
+              <a:rPr sz="2000" b="0" i="1">
+                <a:solidFill>
+                  <a:srgbClr val="828282"/>
                 </a:solidFill>
                 <a:latin typeface="Arial"/>
               </a:rPr>
-              <a:t>Interlude</a:t>
+              <a:t>E o céu e a natureza cantam</a:t>
             </a:r>
           </a:p>
         </p:txBody>
@@ -6199,8 +5429,8 @@
         </p:nvSpPr>
         <p:spPr>
           <a:xfrm>
-            <a:off x="594360" y="4672584"/>
-            <a:ext cx="11002975" cy="347472"/>
+            <a:off x="640080" y="4896612"/>
+            <a:ext cx="10911535" cy="310896"/>
           </a:xfrm>
           <a:prstGeom prst="rect">
             <a:avLst/>
@@ -6217,11 +5447,11 @@
             <a:r>
               <a:rPr sz="2000" b="0" i="1">
                 <a:solidFill>
-                  <a:srgbClr val="8C8C8C"/>
+                  <a:srgbClr val="828282"/>
                 </a:solidFill>
                 <a:latin typeface="Arial"/>
               </a:rPr>
-              <a:t/>
+              <a:t>E o céu e a natureza cantam</a:t>
             </a:r>
           </a:p>
         </p:txBody>
@@ -6260,8 +5490,8 @@
         </p:nvSpPr>
         <p:spPr>
           <a:xfrm>
-            <a:off x="594360" y="2258568"/>
-            <a:ext cx="11002975" cy="685800"/>
+            <a:off x="640080" y="2052828"/>
+            <a:ext cx="10911535" cy="731520"/>
           </a:xfrm>
           <a:prstGeom prst="rect">
             <a:avLst/>
@@ -6276,7 +5506,7 @@
           <a:p>
             <a:pPr algn="ctr"/>
             <a:r>
-              <a:rPr sz="4022" b="1" i="0">
+              <a:rPr sz="4300" b="1" i="0">
                 <a:solidFill>
                   <a:srgbClr val="FFFFFF"/>
                 </a:solidFill>
@@ -6295,8 +5525,8 @@
         </p:nvSpPr>
         <p:spPr>
           <a:xfrm>
-            <a:off x="594360" y="2980944"/>
-            <a:ext cx="11002975" cy="347472"/>
+            <a:off x="640080" y="2985516"/>
+            <a:ext cx="10911535" cy="731520"/>
           </a:xfrm>
           <a:prstGeom prst="rect">
             <a:avLst/>
@@ -6311,83 +5541,13 @@
           <a:p>
             <a:pPr algn="ctr"/>
             <a:r>
-              <a:rPr sz="2200" b="0" i="1">
-                <a:solidFill>
-                  <a:srgbClr val="8C8C8C"/>
-                </a:solidFill>
-                <a:latin typeface="Arial"/>
-              </a:rPr>
-              <a:t/>
-            </a:r>
-          </a:p>
-        </p:txBody>
-      </p:sp>
-      <p:sp>
-        <p:nvSpPr>
-          <p:cNvPr id="4" name="TextBox 3"/>
-          <p:cNvSpPr txBox="1"/>
-          <p:nvPr/>
-        </p:nvSpPr>
-        <p:spPr>
-          <a:xfrm>
-            <a:off x="594360" y="3529584"/>
-            <a:ext cx="11002975" cy="685800"/>
-          </a:xfrm>
-          <a:prstGeom prst="rect">
-            <a:avLst/>
-          </a:prstGeom>
-          <a:noFill/>
-        </p:spPr>
-        <p:txBody>
-          <a:bodyPr wrap="square">
-            <a:spAutoFit/>
-          </a:bodyPr>
-          <a:lstStyle/>
-          <a:p>
-            <a:pPr algn="ctr"/>
-            <a:r>
-              <a:rPr sz="3911" b="1" i="0">
+              <a:rPr sz="4200" b="1" i="0">
                 <a:solidFill>
                   <a:srgbClr val="FFFFFF"/>
                 </a:solidFill>
                 <a:latin typeface="Arial"/>
               </a:rPr>
               <a:t>Que os homens suas canções empreguem</a:t>
-            </a:r>
-          </a:p>
-        </p:txBody>
-      </p:sp>
-      <p:sp>
-        <p:nvSpPr>
-          <p:cNvPr id="5" name="TextBox 4"/>
-          <p:cNvSpPr txBox="1"/>
-          <p:nvPr/>
-        </p:nvSpPr>
-        <p:spPr>
-          <a:xfrm>
-            <a:off x="594360" y="4251960"/>
-            <a:ext cx="11002975" cy="347472"/>
-          </a:xfrm>
-          <a:prstGeom prst="rect">
-            <a:avLst/>
-          </a:prstGeom>
-          <a:noFill/>
-        </p:spPr>
-        <p:txBody>
-          <a:bodyPr wrap="square">
-            <a:spAutoFit/>
-          </a:bodyPr>
-          <a:lstStyle/>
-          <a:p>
-            <a:pPr algn="ctr"/>
-            <a:r>
-              <a:rPr sz="2200" b="0" i="1">
-                <a:solidFill>
-                  <a:srgbClr val="8C8C8C"/>
-                </a:solidFill>
-                <a:latin typeface="Arial"/>
-              </a:rPr>
-              <a:t/>
             </a:r>
           </a:p>
         </p:txBody>
@@ -6426,8 +5586,8 @@
         </p:nvSpPr>
         <p:spPr>
           <a:xfrm>
-            <a:off x="594360" y="2258568"/>
-            <a:ext cx="11002975" cy="685800"/>
+            <a:off x="640080" y="2052828"/>
+            <a:ext cx="10911535" cy="731520"/>
           </a:xfrm>
           <a:prstGeom prst="rect">
             <a:avLst/>
@@ -6442,7 +5602,7 @@
           <a:p>
             <a:pPr algn="ctr"/>
             <a:r>
-              <a:rPr sz="2760" b="1" i="0">
+              <a:rPr sz="3000" b="1" i="0">
                 <a:solidFill>
                   <a:srgbClr val="FFFFFF"/>
                 </a:solidFill>
@@ -6461,8 +5621,8 @@
         </p:nvSpPr>
         <p:spPr>
           <a:xfrm>
-            <a:off x="594360" y="2980944"/>
-            <a:ext cx="11002975" cy="347472"/>
+            <a:off x="640080" y="2985516"/>
+            <a:ext cx="10911535" cy="731520"/>
           </a:xfrm>
           <a:prstGeom prst="rect">
             <a:avLst/>
@@ -6477,83 +5637,13 @@
           <a:p>
             <a:pPr algn="ctr"/>
             <a:r>
-              <a:rPr sz="2200" b="0" i="1">
-                <a:solidFill>
-                  <a:srgbClr val="8C8C8C"/>
-                </a:solidFill>
-                <a:latin typeface="Arial"/>
-              </a:rPr>
-              <a:t/>
-            </a:r>
-          </a:p>
-        </p:txBody>
-      </p:sp>
-      <p:sp>
-        <p:nvSpPr>
-          <p:cNvPr id="4" name="TextBox 3"/>
-          <p:cNvSpPr txBox="1"/>
-          <p:nvPr/>
-        </p:nvSpPr>
-        <p:spPr>
-          <a:xfrm>
-            <a:off x="594360" y="3529584"/>
-            <a:ext cx="11002975" cy="685800"/>
-          </a:xfrm>
-          <a:prstGeom prst="rect">
-            <a:avLst/>
-          </a:prstGeom>
-          <a:noFill/>
-        </p:spPr>
-        <p:txBody>
-          <a:bodyPr wrap="square">
-            <a:spAutoFit/>
-          </a:bodyPr>
-          <a:lstStyle/>
-          <a:p>
-            <a:pPr algn="ctr"/>
-            <a:r>
-              <a:rPr sz="4400" b="1" i="0">
+              <a:rPr sz="4800" b="1" i="0">
                 <a:solidFill>
                   <a:srgbClr val="FFFFFF"/>
                 </a:solidFill>
                 <a:latin typeface="Arial"/>
               </a:rPr>
               <a:t>Repetem o júbilo que ressoa</a:t>
-            </a:r>
-          </a:p>
-        </p:txBody>
-      </p:sp>
-      <p:sp>
-        <p:nvSpPr>
-          <p:cNvPr id="5" name="TextBox 4"/>
-          <p:cNvSpPr txBox="1"/>
-          <p:nvPr/>
-        </p:nvSpPr>
-        <p:spPr>
-          <a:xfrm>
-            <a:off x="594360" y="4251960"/>
-            <a:ext cx="11002975" cy="347472"/>
-          </a:xfrm>
-          <a:prstGeom prst="rect">
-            <a:avLst/>
-          </a:prstGeom>
-          <a:noFill/>
-        </p:spPr>
-        <p:txBody>
-          <a:bodyPr wrap="square">
-            <a:spAutoFit/>
-          </a:bodyPr>
-          <a:lstStyle/>
-          <a:p>
-            <a:pPr algn="ctr"/>
-            <a:r>
-              <a:rPr sz="2200" b="0" i="1">
-                <a:solidFill>
-                  <a:srgbClr val="8C8C8C"/>
-                </a:solidFill>
-                <a:latin typeface="Arial"/>
-              </a:rPr>
-              <a:t/>
             </a:r>
           </a:p>
         </p:txBody>
@@ -6592,8 +5682,8 @@
         </p:nvSpPr>
         <p:spPr>
           <a:xfrm>
-            <a:off x="594360" y="2258568"/>
-            <a:ext cx="11002975" cy="685800"/>
+            <a:off x="640080" y="2052828"/>
+            <a:ext cx="10911535" cy="731520"/>
           </a:xfrm>
           <a:prstGeom prst="rect">
             <a:avLst/>
@@ -6608,7 +5698,7 @@
           <a:p>
             <a:pPr algn="ctr"/>
             <a:r>
-              <a:rPr sz="3610" b="1" i="0">
+              <a:rPr sz="3900" b="1" i="0">
                 <a:solidFill>
                   <a:srgbClr val="FFFFFF"/>
                 </a:solidFill>
@@ -6627,8 +5717,8 @@
         </p:nvSpPr>
         <p:spPr>
           <a:xfrm>
-            <a:off x="594360" y="2980944"/>
-            <a:ext cx="11002975" cy="347472"/>
+            <a:off x="640080" y="2985516"/>
+            <a:ext cx="10911535" cy="731520"/>
           </a:xfrm>
           <a:prstGeom prst="rect">
             <a:avLst/>
@@ -6643,83 +5733,13 @@
           <a:p>
             <a:pPr algn="ctr"/>
             <a:r>
-              <a:rPr sz="2200" b="0" i="1">
-                <a:solidFill>
-                  <a:srgbClr val="8C8C8C"/>
-                </a:solidFill>
-                <a:latin typeface="Arial"/>
-              </a:rPr>
-              <a:t/>
-            </a:r>
-          </a:p>
-        </p:txBody>
-      </p:sp>
-      <p:sp>
-        <p:nvSpPr>
-          <p:cNvPr id="4" name="TextBox 3"/>
-          <p:cNvSpPr txBox="1"/>
-          <p:nvPr/>
-        </p:nvSpPr>
-        <p:spPr>
-          <a:xfrm>
-            <a:off x="594360" y="3529584"/>
-            <a:ext cx="11002975" cy="685800"/>
-          </a:xfrm>
-          <a:prstGeom prst="rect">
-            <a:avLst/>
-          </a:prstGeom>
-          <a:noFill/>
-        </p:spPr>
-        <p:txBody>
-          <a:bodyPr wrap="square">
-            <a:spAutoFit/>
-          </a:bodyPr>
-          <a:lstStyle/>
-          <a:p>
-            <a:pPr algn="ctr"/>
-            <a:r>
-              <a:rPr sz="3610" b="1" i="0">
+              <a:rPr sz="3900" b="1" i="0">
                 <a:solidFill>
                   <a:srgbClr val="FFFFFF"/>
                 </a:solidFill>
                 <a:latin typeface="Arial"/>
               </a:rPr>
               <a:t>E as maravilhas, maravilhas do Seu amor</a:t>
-            </a:r>
-          </a:p>
-        </p:txBody>
-      </p:sp>
-      <p:sp>
-        <p:nvSpPr>
-          <p:cNvPr id="5" name="TextBox 4"/>
-          <p:cNvSpPr txBox="1"/>
-          <p:nvPr/>
-        </p:nvSpPr>
-        <p:spPr>
-          <a:xfrm>
-            <a:off x="594360" y="4251960"/>
-            <a:ext cx="11002975" cy="347472"/>
-          </a:xfrm>
-          <a:prstGeom prst="rect">
-            <a:avLst/>
-          </a:prstGeom>
-          <a:noFill/>
-        </p:spPr>
-        <p:txBody>
-          <a:bodyPr wrap="square">
-            <a:spAutoFit/>
-          </a:bodyPr>
-          <a:lstStyle/>
-          <a:p>
-            <a:pPr algn="ctr"/>
-            <a:r>
-              <a:rPr sz="2200" b="0" i="1">
-                <a:solidFill>
-                  <a:srgbClr val="8C8C8C"/>
-                </a:solidFill>
-                <a:latin typeface="Arial"/>
-              </a:rPr>
-              <a:t/>
             </a:r>
           </a:p>
         </p:txBody>

--- a/output_pptx/Joy_To_The_World.pptx
+++ b/output_pptx/Joy_To_The_World.pptx
@@ -3185,6 +3185,76 @@
           </a:p>
         </p:txBody>
       </p:sp>
+      <p:sp>
+        <p:nvSpPr>
+          <p:cNvPr id="4" name="TextBox 3"/>
+          <p:cNvSpPr txBox="1"/>
+          <p:nvPr/>
+        </p:nvSpPr>
+        <p:spPr>
+          <a:xfrm>
+            <a:off x="640080" y="4128516"/>
+            <a:ext cx="10911535" cy="310896"/>
+          </a:xfrm>
+          <a:prstGeom prst="rect">
+            <a:avLst/>
+          </a:prstGeom>
+          <a:noFill/>
+        </p:spPr>
+        <p:txBody>
+          <a:bodyPr wrap="square">
+            <a:spAutoFit/>
+          </a:bodyPr>
+          <a:lstStyle/>
+          <a:p>
+            <a:pPr algn="ctr"/>
+            <a:r>
+              <a:rPr sz="2000" b="0" i="0">
+                <a:solidFill>
+                  <a:srgbClr val="828282"/>
+                </a:solidFill>
+                <a:latin typeface="Arial"/>
+              </a:rPr>
+              <a:t>世界に喜びを</a:t>
+            </a:r>
+          </a:p>
+        </p:txBody>
+      </p:sp>
+      <p:sp>
+        <p:nvSpPr>
+          <p:cNvPr id="5" name="TextBox 4"/>
+          <p:cNvSpPr txBox="1"/>
+          <p:nvPr/>
+        </p:nvSpPr>
+        <p:spPr>
+          <a:xfrm>
+            <a:off x="640080" y="4494276"/>
+            <a:ext cx="10911535" cy="310896"/>
+          </a:xfrm>
+          <a:prstGeom prst="rect">
+            <a:avLst/>
+          </a:prstGeom>
+          <a:noFill/>
+        </p:spPr>
+        <p:txBody>
+          <a:bodyPr wrap="square">
+            <a:spAutoFit/>
+          </a:bodyPr>
+          <a:lstStyle/>
+          <a:p>
+            <a:pPr algn="ctr"/>
+            <a:r>
+              <a:rPr sz="2000" b="0" i="0">
+                <a:solidFill>
+                  <a:srgbClr val="828282"/>
+                </a:solidFill>
+                <a:latin typeface="Arial"/>
+              </a:rPr>
+              <a:t>世界に喜びを！主が来られる！</a:t>
+            </a:r>
+          </a:p>
+        </p:txBody>
+      </p:sp>
     </p:spTree>
   </p:cSld>
   <p:clrMapOvr>
@@ -3281,6 +3351,76 @@
           </a:p>
         </p:txBody>
       </p:sp>
+      <p:sp>
+        <p:nvSpPr>
+          <p:cNvPr id="4" name="TextBox 3"/>
+          <p:cNvSpPr txBox="1"/>
+          <p:nvPr/>
+        </p:nvSpPr>
+        <p:spPr>
+          <a:xfrm>
+            <a:off x="640080" y="4128516"/>
+            <a:ext cx="10911535" cy="310896"/>
+          </a:xfrm>
+          <a:prstGeom prst="rect">
+            <a:avLst/>
+          </a:prstGeom>
+          <a:noFill/>
+        </p:spPr>
+        <p:txBody>
+          <a:bodyPr wrap="square">
+            <a:spAutoFit/>
+          </a:bodyPr>
+          <a:lstStyle/>
+          <a:p>
+            <a:pPr algn="ctr"/>
+            <a:r>
+              <a:rPr sz="2000" b="0" i="0">
+                <a:solidFill>
+                  <a:srgbClr val="828282"/>
+                </a:solidFill>
+                <a:latin typeface="Arial"/>
+              </a:rPr>
+              <a:t>そして主の愛の奇跡、奇跡が</a:t>
+            </a:r>
+          </a:p>
+        </p:txBody>
+      </p:sp>
+      <p:sp>
+        <p:nvSpPr>
+          <p:cNvPr id="5" name="TextBox 4"/>
+          <p:cNvSpPr txBox="1"/>
+          <p:nvPr/>
+        </p:nvSpPr>
+        <p:spPr>
+          <a:xfrm>
+            <a:off x="640080" y="4494276"/>
+            <a:ext cx="10911535" cy="310896"/>
+          </a:xfrm>
+          <a:prstGeom prst="rect">
+            <a:avLst/>
+          </a:prstGeom>
+          <a:noFill/>
+        </p:spPr>
+        <p:txBody>
+          <a:bodyPr wrap="square">
+            <a:spAutoFit/>
+          </a:bodyPr>
+          <a:lstStyle/>
+          <a:p>
+            <a:pPr algn="ctr"/>
+            <a:r>
+              <a:rPr sz="2000" b="0" i="0">
+                <a:solidFill>
+                  <a:srgbClr val="828282"/>
+                </a:solidFill>
+                <a:latin typeface="Arial"/>
+              </a:rPr>
+              <a:t>そして主の愛の奇跡、奇跡が</a:t>
+            </a:r>
+          </a:p>
+        </p:txBody>
+      </p:sp>
     </p:spTree>
   </p:cSld>
   <p:clrMapOvr>
@@ -3377,6 +3517,76 @@
           </a:p>
         </p:txBody>
       </p:sp>
+      <p:sp>
+        <p:nvSpPr>
+          <p:cNvPr id="4" name="TextBox 3"/>
+          <p:cNvSpPr txBox="1"/>
+          <p:nvPr/>
+        </p:nvSpPr>
+        <p:spPr>
+          <a:xfrm>
+            <a:off x="640080" y="4128516"/>
+            <a:ext cx="10911535" cy="310896"/>
+          </a:xfrm>
+          <a:prstGeom prst="rect">
+            <a:avLst/>
+          </a:prstGeom>
+          <a:noFill/>
+        </p:spPr>
+        <p:txBody>
+          <a:bodyPr wrap="square">
+            <a:spAutoFit/>
+          </a:bodyPr>
+          <a:lstStyle/>
+          <a:p>
+            <a:pPr algn="ctr"/>
+            <a:r>
+              <a:rPr sz="2000" b="0" i="0">
+                <a:solidFill>
+                  <a:srgbClr val="828282"/>
+                </a:solidFill>
+                <a:latin typeface="Arial"/>
+              </a:rPr>
+              <a:t>響き渡る喜びを繰り返す、繰り返す</a:t>
+            </a:r>
+          </a:p>
+        </p:txBody>
+      </p:sp>
+      <p:sp>
+        <p:nvSpPr>
+          <p:cNvPr id="5" name="TextBox 4"/>
+          <p:cNvSpPr txBox="1"/>
+          <p:nvPr/>
+        </p:nvSpPr>
+        <p:spPr>
+          <a:xfrm>
+            <a:off x="640080" y="4494276"/>
+            <a:ext cx="10911535" cy="310896"/>
+          </a:xfrm>
+          <a:prstGeom prst="rect">
+            <a:avLst/>
+          </a:prstGeom>
+          <a:noFill/>
+        </p:spPr>
+        <p:txBody>
+          <a:bodyPr wrap="square">
+            <a:spAutoFit/>
+          </a:bodyPr>
+          <a:lstStyle/>
+          <a:p>
+            <a:pPr algn="ctr"/>
+            <a:r>
+              <a:rPr sz="2000" b="0" i="0">
+                <a:solidFill>
+                  <a:srgbClr val="828282"/>
+                </a:solidFill>
+                <a:latin typeface="Arial"/>
+              </a:rPr>
+              <a:t>主は真実と恵みで世界を統治され</a:t>
+            </a:r>
+          </a:p>
+        </p:txBody>
+      </p:sp>
     </p:spTree>
   </p:cSld>
   <p:clrMapOvr>
@@ -3473,6 +3683,76 @@
           </a:p>
         </p:txBody>
       </p:sp>
+      <p:sp>
+        <p:nvSpPr>
+          <p:cNvPr id="4" name="TextBox 3"/>
+          <p:cNvSpPr txBox="1"/>
+          <p:nvPr/>
+        </p:nvSpPr>
+        <p:spPr>
+          <a:xfrm>
+            <a:off x="640080" y="4128516"/>
+            <a:ext cx="10911535" cy="310896"/>
+          </a:xfrm>
+          <a:prstGeom prst="rect">
+            <a:avLst/>
+          </a:prstGeom>
+          <a:noFill/>
+        </p:spPr>
+        <p:txBody>
+          <a:bodyPr wrap="square">
+            <a:spAutoFit/>
+          </a:bodyPr>
+          <a:lstStyle/>
+          <a:p>
+            <a:pPr algn="ctr"/>
+            <a:r>
+              <a:rPr sz="2000" b="0" i="0">
+                <a:solidFill>
+                  <a:srgbClr val="828282"/>
+                </a:solidFill>
+                <a:latin typeface="Arial"/>
+              </a:rPr>
+              <a:t>国々に発見させる</a:t>
+            </a:r>
+          </a:p>
+        </p:txBody>
+      </p:sp>
+      <p:sp>
+        <p:nvSpPr>
+          <p:cNvPr id="5" name="TextBox 4"/>
+          <p:cNvSpPr txBox="1"/>
+          <p:nvPr/>
+        </p:nvSpPr>
+        <p:spPr>
+          <a:xfrm>
+            <a:off x="640080" y="4494276"/>
+            <a:ext cx="10911535" cy="310896"/>
+          </a:xfrm>
+          <a:prstGeom prst="rect">
+            <a:avLst/>
+          </a:prstGeom>
+          <a:noFill/>
+        </p:spPr>
+        <p:txBody>
+          <a:bodyPr wrap="square">
+            <a:spAutoFit/>
+          </a:bodyPr>
+          <a:lstStyle/>
+          <a:p>
+            <a:pPr algn="ctr"/>
+            <a:r>
+              <a:rPr sz="2000" b="0" i="0">
+                <a:solidFill>
+                  <a:srgbClr val="828282"/>
+                </a:solidFill>
+                <a:latin typeface="Arial"/>
+              </a:rPr>
+              <a:t>主の義の栄光を</a:t>
+            </a:r>
+          </a:p>
+        </p:txBody>
+      </p:sp>
     </p:spTree>
   </p:cSld>
   <p:clrMapOvr>
@@ -3569,6 +3849,76 @@
           </a:p>
         </p:txBody>
       </p:sp>
+      <p:sp>
+        <p:nvSpPr>
+          <p:cNvPr id="4" name="TextBox 3"/>
+          <p:cNvSpPr txBox="1"/>
+          <p:nvPr/>
+        </p:nvSpPr>
+        <p:spPr>
+          <a:xfrm>
+            <a:off x="640080" y="4128516"/>
+            <a:ext cx="10911535" cy="310896"/>
+          </a:xfrm>
+          <a:prstGeom prst="rect">
+            <a:avLst/>
+          </a:prstGeom>
+          <a:noFill/>
+        </p:spPr>
+        <p:txBody>
+          <a:bodyPr wrap="square">
+            <a:spAutoFit/>
+          </a:bodyPr>
+          <a:lstStyle/>
+          <a:p>
+            <a:pPr algn="ctr"/>
+            <a:r>
+              <a:rPr sz="2000" b="0" i="0">
+                <a:solidFill>
+                  <a:srgbClr val="828282"/>
+                </a:solidFill>
+                <a:latin typeface="Arial"/>
+              </a:rPr>
+              <a:t>そして主の愛の奇跡を</a:t>
+            </a:r>
+          </a:p>
+        </p:txBody>
+      </p:sp>
+      <p:sp>
+        <p:nvSpPr>
+          <p:cNvPr id="5" name="TextBox 4"/>
+          <p:cNvSpPr txBox="1"/>
+          <p:nvPr/>
+        </p:nvSpPr>
+        <p:spPr>
+          <a:xfrm>
+            <a:off x="640080" y="4494276"/>
+            <a:ext cx="10911535" cy="310896"/>
+          </a:xfrm>
+          <a:prstGeom prst="rect">
+            <a:avLst/>
+          </a:prstGeom>
+          <a:noFill/>
+        </p:spPr>
+        <p:txBody>
+          <a:bodyPr wrap="square">
+            <a:spAutoFit/>
+          </a:bodyPr>
+          <a:lstStyle/>
+          <a:p>
+            <a:pPr algn="ctr"/>
+            <a:r>
+              <a:rPr sz="2000" b="0" i="0">
+                <a:solidFill>
+                  <a:srgbClr val="828282"/>
+                </a:solidFill>
+                <a:latin typeface="Arial"/>
+              </a:rPr>
+              <a:t>そして主の愛の奇跡を</a:t>
+            </a:r>
+          </a:p>
+        </p:txBody>
+      </p:sp>
     </p:spTree>
   </p:cSld>
   <p:clrMapOvr>
@@ -4268,6 +4618,76 @@
           </a:p>
         </p:txBody>
       </p:sp>
+      <p:sp>
+        <p:nvSpPr>
+          <p:cNvPr id="4" name="TextBox 3"/>
+          <p:cNvSpPr txBox="1"/>
+          <p:nvPr/>
+        </p:nvSpPr>
+        <p:spPr>
+          <a:xfrm>
+            <a:off x="640080" y="4128516"/>
+            <a:ext cx="10911535" cy="310896"/>
+          </a:xfrm>
+          <a:prstGeom prst="rect">
+            <a:avLst/>
+          </a:prstGeom>
+          <a:noFill/>
+        </p:spPr>
+        <p:txBody>
+          <a:bodyPr wrap="square">
+            <a:spAutoFit/>
+          </a:bodyPr>
+          <a:lstStyle/>
+          <a:p>
+            <a:pPr algn="ctr"/>
+            <a:r>
+              <a:rPr sz="2000" b="0" i="0">
+                <a:solidFill>
+                  <a:srgbClr val="828282"/>
+                </a:solidFill>
+                <a:latin typeface="Arial"/>
+              </a:rPr>
+              <a:t>世界に喜びを！救い主が統治される！</a:t>
+            </a:r>
+          </a:p>
+        </p:txBody>
+      </p:sp>
+      <p:sp>
+        <p:nvSpPr>
+          <p:cNvPr id="5" name="TextBox 4"/>
+          <p:cNvSpPr txBox="1"/>
+          <p:nvPr/>
+        </p:nvSpPr>
+        <p:spPr>
+          <a:xfrm>
+            <a:off x="640080" y="4494276"/>
+            <a:ext cx="10911535" cy="310896"/>
+          </a:xfrm>
+          <a:prstGeom prst="rect">
+            <a:avLst/>
+          </a:prstGeom>
+          <a:noFill/>
+        </p:spPr>
+        <p:txBody>
+          <a:bodyPr wrap="square">
+            <a:spAutoFit/>
+          </a:bodyPr>
+          <a:lstStyle/>
+          <a:p>
+            <a:pPr algn="ctr"/>
+            <a:r>
+              <a:rPr sz="2000" b="0" i="0">
+                <a:solidFill>
+                  <a:srgbClr val="828282"/>
+                </a:solidFill>
+                <a:latin typeface="Arial"/>
+              </a:rPr>
+              <a:t>人々がその歌を歌おう</a:t>
+            </a:r>
+          </a:p>
+        </p:txBody>
+      </p:sp>
     </p:spTree>
   </p:cSld>
   <p:clrMapOvr>
@@ -4364,6 +4784,76 @@
           </a:p>
         </p:txBody>
       </p:sp>
+      <p:sp>
+        <p:nvSpPr>
+          <p:cNvPr id="4" name="TextBox 3"/>
+          <p:cNvSpPr txBox="1"/>
+          <p:nvPr/>
+        </p:nvSpPr>
+        <p:spPr>
+          <a:xfrm>
+            <a:off x="640080" y="4128516"/>
+            <a:ext cx="10911535" cy="310896"/>
+          </a:xfrm>
+          <a:prstGeom prst="rect">
+            <a:avLst/>
+          </a:prstGeom>
+          <a:noFill/>
+        </p:spPr>
+        <p:txBody>
+          <a:bodyPr wrap="square">
+            <a:spAutoFit/>
+          </a:bodyPr>
+          <a:lstStyle/>
+          <a:p>
+            <a:pPr algn="ctr"/>
+            <a:r>
+              <a:rPr sz="2000" b="0" i="0">
+                <a:solidFill>
+                  <a:srgbClr val="828282"/>
+                </a:solidFill>
+                <a:latin typeface="Arial"/>
+              </a:rPr>
+              <a:t>野原と川、岩と丘と平野が</a:t>
+            </a:r>
+          </a:p>
+        </p:txBody>
+      </p:sp>
+      <p:sp>
+        <p:nvSpPr>
+          <p:cNvPr id="5" name="TextBox 4"/>
+          <p:cNvSpPr txBox="1"/>
+          <p:nvPr/>
+        </p:nvSpPr>
+        <p:spPr>
+          <a:xfrm>
+            <a:off x="640080" y="4494276"/>
+            <a:ext cx="10911535" cy="310896"/>
+          </a:xfrm>
+          <a:prstGeom prst="rect">
+            <a:avLst/>
+          </a:prstGeom>
+          <a:noFill/>
+        </p:spPr>
+        <p:txBody>
+          <a:bodyPr wrap="square">
+            <a:spAutoFit/>
+          </a:bodyPr>
+          <a:lstStyle/>
+          <a:p>
+            <a:pPr algn="ctr"/>
+            <a:r>
+              <a:rPr sz="2000" b="0" i="0">
+                <a:solidFill>
+                  <a:srgbClr val="828282"/>
+                </a:solidFill>
+                <a:latin typeface="Arial"/>
+              </a:rPr>
+              <a:t>響き渡る喜びを繰り返す</a:t>
+            </a:r>
+          </a:p>
+        </p:txBody>
+      </p:sp>
     </p:spTree>
   </p:cSld>
   <p:clrMapOvr>
@@ -4460,6 +4950,76 @@
           </a:p>
         </p:txBody>
       </p:sp>
+      <p:sp>
+        <p:nvSpPr>
+          <p:cNvPr id="4" name="TextBox 3"/>
+          <p:cNvSpPr txBox="1"/>
+          <p:nvPr/>
+        </p:nvSpPr>
+        <p:spPr>
+          <a:xfrm>
+            <a:off x="640080" y="4128516"/>
+            <a:ext cx="10911535" cy="310896"/>
+          </a:xfrm>
+          <a:prstGeom prst="rect">
+            <a:avLst/>
+          </a:prstGeom>
+          <a:noFill/>
+        </p:spPr>
+        <p:txBody>
+          <a:bodyPr wrap="square">
+            <a:spAutoFit/>
+          </a:bodyPr>
+          <a:lstStyle/>
+          <a:p>
+            <a:pPr algn="ctr"/>
+            <a:r>
+              <a:rPr sz="2000" b="0" i="0">
+                <a:solidFill>
+                  <a:srgbClr val="828282"/>
+                </a:solidFill>
+                <a:latin typeface="Arial"/>
+              </a:rPr>
+              <a:t>そして主の愛の奇跡、奇跡が</a:t>
+            </a:r>
+          </a:p>
+        </p:txBody>
+      </p:sp>
+      <p:sp>
+        <p:nvSpPr>
+          <p:cNvPr id="5" name="TextBox 4"/>
+          <p:cNvSpPr txBox="1"/>
+          <p:nvPr/>
+        </p:nvSpPr>
+        <p:spPr>
+          <a:xfrm>
+            <a:off x="640080" y="4494276"/>
+            <a:ext cx="10911535" cy="310896"/>
+          </a:xfrm>
+          <a:prstGeom prst="rect">
+            <a:avLst/>
+          </a:prstGeom>
+          <a:noFill/>
+        </p:spPr>
+        <p:txBody>
+          <a:bodyPr wrap="square">
+            <a:spAutoFit/>
+          </a:bodyPr>
+          <a:lstStyle/>
+          <a:p>
+            <a:pPr algn="ctr"/>
+            <a:r>
+              <a:rPr sz="2000" b="0" i="0">
+                <a:solidFill>
+                  <a:srgbClr val="828282"/>
+                </a:solidFill>
+                <a:latin typeface="Arial"/>
+              </a:rPr>
+              <a:t>そして主の愛の奇跡、奇跡が</a:t>
+            </a:r>
+          </a:p>
+        </p:txBody>
+      </p:sp>
     </p:spTree>
   </p:cSld>
   <p:clrMapOvr>
@@ -4556,6 +5116,76 @@
           </a:p>
         </p:txBody>
       </p:sp>
+      <p:sp>
+        <p:nvSpPr>
+          <p:cNvPr id="4" name="TextBox 3"/>
+          <p:cNvSpPr txBox="1"/>
+          <p:nvPr/>
+        </p:nvSpPr>
+        <p:spPr>
+          <a:xfrm>
+            <a:off x="640080" y="4128516"/>
+            <a:ext cx="10911535" cy="310896"/>
+          </a:xfrm>
+          <a:prstGeom prst="rect">
+            <a:avLst/>
+          </a:prstGeom>
+          <a:noFill/>
+        </p:spPr>
+        <p:txBody>
+          <a:bodyPr wrap="square">
+            <a:spAutoFit/>
+          </a:bodyPr>
+          <a:lstStyle/>
+          <a:p>
+            <a:pPr algn="ctr"/>
+            <a:r>
+              <a:rPr sz="2000" b="0" i="0">
+                <a:solidFill>
+                  <a:srgbClr val="828282"/>
+                </a:solidFill>
+                <a:latin typeface="Arial"/>
+              </a:rPr>
+              <a:t>地が主を迎えよ</a:t>
+            </a:r>
+          </a:p>
+        </p:txBody>
+      </p:sp>
+      <p:sp>
+        <p:nvSpPr>
+          <p:cNvPr id="5" name="TextBox 4"/>
+          <p:cNvSpPr txBox="1"/>
+          <p:nvPr/>
+        </p:nvSpPr>
+        <p:spPr>
+          <a:xfrm>
+            <a:off x="640080" y="4494276"/>
+            <a:ext cx="10911535" cy="310896"/>
+          </a:xfrm>
+          <a:prstGeom prst="rect">
+            <a:avLst/>
+          </a:prstGeom>
+          <a:noFill/>
+        </p:spPr>
+        <p:txBody>
+          <a:bodyPr wrap="square">
+            <a:spAutoFit/>
+          </a:bodyPr>
+          <a:lstStyle/>
+          <a:p>
+            <a:pPr algn="ctr"/>
+            <a:r>
+              <a:rPr sz="2000" b="0" i="0">
+                <a:solidFill>
+                  <a:srgbClr val="828282"/>
+                </a:solidFill>
+                <a:latin typeface="Arial"/>
+              </a:rPr>
+              <a:t>すべての心が主のために住まいを整えよ</a:t>
+            </a:r>
+          </a:p>
+        </p:txBody>
+      </p:sp>
     </p:spTree>
   </p:cSld>
   <p:clrMapOvr>
@@ -4652,6 +5282,76 @@
           </a:p>
         </p:txBody>
       </p:sp>
+      <p:sp>
+        <p:nvSpPr>
+          <p:cNvPr id="4" name="TextBox 3"/>
+          <p:cNvSpPr txBox="1"/>
+          <p:nvPr/>
+        </p:nvSpPr>
+        <p:spPr>
+          <a:xfrm>
+            <a:off x="640080" y="4128516"/>
+            <a:ext cx="10911535" cy="310896"/>
+          </a:xfrm>
+          <a:prstGeom prst="rect">
+            <a:avLst/>
+          </a:prstGeom>
+          <a:noFill/>
+        </p:spPr>
+        <p:txBody>
+          <a:bodyPr wrap="square">
+            <a:spAutoFit/>
+          </a:bodyPr>
+          <a:lstStyle/>
+          <a:p>
+            <a:pPr algn="ctr"/>
+            <a:r>
+              <a:rPr sz="2000" b="0" i="0">
+                <a:solidFill>
+                  <a:srgbClr val="828282"/>
+                </a:solidFill>
+                <a:latin typeface="Arial"/>
+              </a:rPr>
+              <a:t>そして主の愛の奇跡、奇跡が</a:t>
+            </a:r>
+          </a:p>
+        </p:txBody>
+      </p:sp>
+      <p:sp>
+        <p:nvSpPr>
+          <p:cNvPr id="5" name="TextBox 4"/>
+          <p:cNvSpPr txBox="1"/>
+          <p:nvPr/>
+        </p:nvSpPr>
+        <p:spPr>
+          <a:xfrm>
+            <a:off x="640080" y="4494276"/>
+            <a:ext cx="10911535" cy="310896"/>
+          </a:xfrm>
+          <a:prstGeom prst="rect">
+            <a:avLst/>
+          </a:prstGeom>
+          <a:noFill/>
+        </p:spPr>
+        <p:txBody>
+          <a:bodyPr wrap="square">
+            <a:spAutoFit/>
+          </a:bodyPr>
+          <a:lstStyle/>
+          <a:p>
+            <a:pPr algn="ctr"/>
+            <a:r>
+              <a:rPr sz="2000" b="0" i="0">
+                <a:solidFill>
+                  <a:srgbClr val="828282"/>
+                </a:solidFill>
+                <a:latin typeface="Arial"/>
+              </a:rPr>
+              <a:t>そして主の愛の奇跡、奇跡が</a:t>
+            </a:r>
+          </a:p>
+        </p:txBody>
+      </p:sp>
     </p:spTree>
   </p:cSld>
   <p:clrMapOvr>
@@ -4748,6 +5448,76 @@
           </a:p>
         </p:txBody>
       </p:sp>
+      <p:sp>
+        <p:nvSpPr>
+          <p:cNvPr id="4" name="TextBox 3"/>
+          <p:cNvSpPr txBox="1"/>
+          <p:nvPr/>
+        </p:nvSpPr>
+        <p:spPr>
+          <a:xfrm>
+            <a:off x="640080" y="4128516"/>
+            <a:ext cx="10911535" cy="310896"/>
+          </a:xfrm>
+          <a:prstGeom prst="rect">
+            <a:avLst/>
+          </a:prstGeom>
+          <a:noFill/>
+        </p:spPr>
+        <p:txBody>
+          <a:bodyPr wrap="square">
+            <a:spAutoFit/>
+          </a:bodyPr>
+          <a:lstStyle/>
+          <a:p>
+            <a:pPr algn="ctr"/>
+            <a:r>
+              <a:rPr sz="2000" b="0" i="0">
+                <a:solidFill>
+                  <a:srgbClr val="828282"/>
+                </a:solidFill>
+                <a:latin typeface="Arial"/>
+              </a:rPr>
+              <a:t>天と自然が歌う</a:t>
+            </a:r>
+          </a:p>
+        </p:txBody>
+      </p:sp>
+      <p:sp>
+        <p:nvSpPr>
+          <p:cNvPr id="5" name="TextBox 4"/>
+          <p:cNvSpPr txBox="1"/>
+          <p:nvPr/>
+        </p:nvSpPr>
+        <p:spPr>
+          <a:xfrm>
+            <a:off x="640080" y="4494276"/>
+            <a:ext cx="10911535" cy="310896"/>
+          </a:xfrm>
+          <a:prstGeom prst="rect">
+            <a:avLst/>
+          </a:prstGeom>
+          <a:noFill/>
+        </p:spPr>
+        <p:txBody>
+          <a:bodyPr wrap="square">
+            <a:spAutoFit/>
+          </a:bodyPr>
+          <a:lstStyle/>
+          <a:p>
+            <a:pPr algn="ctr"/>
+            <a:r>
+              <a:rPr sz="2000" b="0" i="0">
+                <a:solidFill>
+                  <a:srgbClr val="828282"/>
+                </a:solidFill>
+                <a:latin typeface="Arial"/>
+              </a:rPr>
+              <a:t>天と自然が歌う</a:t>
+            </a:r>
+          </a:p>
+        </p:txBody>
+      </p:sp>
     </p:spTree>
   </p:cSld>
   <p:clrMapOvr>
@@ -5552,6 +6322,76 @@
           </a:p>
         </p:txBody>
       </p:sp>
+      <p:sp>
+        <p:nvSpPr>
+          <p:cNvPr id="4" name="TextBox 3"/>
+          <p:cNvSpPr txBox="1"/>
+          <p:nvPr/>
+        </p:nvSpPr>
+        <p:spPr>
+          <a:xfrm>
+            <a:off x="640080" y="4128516"/>
+            <a:ext cx="10911535" cy="310896"/>
+          </a:xfrm>
+          <a:prstGeom prst="rect">
+            <a:avLst/>
+          </a:prstGeom>
+          <a:noFill/>
+        </p:spPr>
+        <p:txBody>
+          <a:bodyPr wrap="square">
+            <a:spAutoFit/>
+          </a:bodyPr>
+          <a:lstStyle/>
+          <a:p>
+            <a:pPr algn="ctr"/>
+            <a:r>
+              <a:rPr sz="2000" b="0" i="0">
+                <a:solidFill>
+                  <a:srgbClr val="828282"/>
+                </a:solidFill>
+                <a:latin typeface="Arial"/>
+              </a:rPr>
+              <a:t>世界に喜びを！救い主が統治される！</a:t>
+            </a:r>
+          </a:p>
+        </p:txBody>
+      </p:sp>
+      <p:sp>
+        <p:nvSpPr>
+          <p:cNvPr id="5" name="TextBox 4"/>
+          <p:cNvSpPr txBox="1"/>
+          <p:nvPr/>
+        </p:nvSpPr>
+        <p:spPr>
+          <a:xfrm>
+            <a:off x="640080" y="4494276"/>
+            <a:ext cx="10911535" cy="310896"/>
+          </a:xfrm>
+          <a:prstGeom prst="rect">
+            <a:avLst/>
+          </a:prstGeom>
+          <a:noFill/>
+        </p:spPr>
+        <p:txBody>
+          <a:bodyPr wrap="square">
+            <a:spAutoFit/>
+          </a:bodyPr>
+          <a:lstStyle/>
+          <a:p>
+            <a:pPr algn="ctr"/>
+            <a:r>
+              <a:rPr sz="2000" b="0" i="0">
+                <a:solidFill>
+                  <a:srgbClr val="828282"/>
+                </a:solidFill>
+                <a:latin typeface="Arial"/>
+              </a:rPr>
+              <a:t>人々がその歌を歌おう</a:t>
+            </a:r>
+          </a:p>
+        </p:txBody>
+      </p:sp>
     </p:spTree>
   </p:cSld>
   <p:clrMapOvr>
@@ -5648,6 +6488,76 @@
           </a:p>
         </p:txBody>
       </p:sp>
+      <p:sp>
+        <p:nvSpPr>
+          <p:cNvPr id="4" name="TextBox 3"/>
+          <p:cNvSpPr txBox="1"/>
+          <p:nvPr/>
+        </p:nvSpPr>
+        <p:spPr>
+          <a:xfrm>
+            <a:off x="640080" y="4128516"/>
+            <a:ext cx="10911535" cy="310896"/>
+          </a:xfrm>
+          <a:prstGeom prst="rect">
+            <a:avLst/>
+          </a:prstGeom>
+          <a:noFill/>
+        </p:spPr>
+        <p:txBody>
+          <a:bodyPr wrap="square">
+            <a:spAutoFit/>
+          </a:bodyPr>
+          <a:lstStyle/>
+          <a:p>
+            <a:pPr algn="ctr"/>
+            <a:r>
+              <a:rPr sz="2000" b="0" i="0">
+                <a:solidFill>
+                  <a:srgbClr val="828282"/>
+                </a:solidFill>
+                <a:latin typeface="Arial"/>
+              </a:rPr>
+              <a:t>野原と川、岩と丘と平野が</a:t>
+            </a:r>
+          </a:p>
+        </p:txBody>
+      </p:sp>
+      <p:sp>
+        <p:nvSpPr>
+          <p:cNvPr id="5" name="TextBox 4"/>
+          <p:cNvSpPr txBox="1"/>
+          <p:nvPr/>
+        </p:nvSpPr>
+        <p:spPr>
+          <a:xfrm>
+            <a:off x="640080" y="4494276"/>
+            <a:ext cx="10911535" cy="310896"/>
+          </a:xfrm>
+          <a:prstGeom prst="rect">
+            <a:avLst/>
+          </a:prstGeom>
+          <a:noFill/>
+        </p:spPr>
+        <p:txBody>
+          <a:bodyPr wrap="square">
+            <a:spAutoFit/>
+          </a:bodyPr>
+          <a:lstStyle/>
+          <a:p>
+            <a:pPr algn="ctr"/>
+            <a:r>
+              <a:rPr sz="2000" b="0" i="0">
+                <a:solidFill>
+                  <a:srgbClr val="828282"/>
+                </a:solidFill>
+                <a:latin typeface="Arial"/>
+              </a:rPr>
+              <a:t>響き渡る喜びを繰り返す</a:t>
+            </a:r>
+          </a:p>
+        </p:txBody>
+      </p:sp>
     </p:spTree>
   </p:cSld>
   <p:clrMapOvr>
@@ -5740,6 +6650,76 @@
                 <a:latin typeface="Arial"/>
               </a:rPr>
               <a:t>E as maravilhas, maravilhas do Seu amor</a:t>
+            </a:r>
+          </a:p>
+        </p:txBody>
+      </p:sp>
+      <p:sp>
+        <p:nvSpPr>
+          <p:cNvPr id="4" name="TextBox 3"/>
+          <p:cNvSpPr txBox="1"/>
+          <p:nvPr/>
+        </p:nvSpPr>
+        <p:spPr>
+          <a:xfrm>
+            <a:off x="640080" y="4128516"/>
+            <a:ext cx="10911535" cy="310896"/>
+          </a:xfrm>
+          <a:prstGeom prst="rect">
+            <a:avLst/>
+          </a:prstGeom>
+          <a:noFill/>
+        </p:spPr>
+        <p:txBody>
+          <a:bodyPr wrap="square">
+            <a:spAutoFit/>
+          </a:bodyPr>
+          <a:lstStyle/>
+          <a:p>
+            <a:pPr algn="ctr"/>
+            <a:r>
+              <a:rPr sz="2000" b="0" i="0">
+                <a:solidFill>
+                  <a:srgbClr val="828282"/>
+                </a:solidFill>
+                <a:latin typeface="Arial"/>
+              </a:rPr>
+              <a:t>そして主の愛の奇跡、奇跡が</a:t>
+            </a:r>
+          </a:p>
+        </p:txBody>
+      </p:sp>
+      <p:sp>
+        <p:nvSpPr>
+          <p:cNvPr id="5" name="TextBox 4"/>
+          <p:cNvSpPr txBox="1"/>
+          <p:nvPr/>
+        </p:nvSpPr>
+        <p:spPr>
+          <a:xfrm>
+            <a:off x="640080" y="4494276"/>
+            <a:ext cx="10911535" cy="310896"/>
+          </a:xfrm>
+          <a:prstGeom prst="rect">
+            <a:avLst/>
+          </a:prstGeom>
+          <a:noFill/>
+        </p:spPr>
+        <p:txBody>
+          <a:bodyPr wrap="square">
+            <a:spAutoFit/>
+          </a:bodyPr>
+          <a:lstStyle/>
+          <a:p>
+            <a:pPr algn="ctr"/>
+            <a:r>
+              <a:rPr sz="2000" b="0" i="0">
+                <a:solidFill>
+                  <a:srgbClr val="828282"/>
+                </a:solidFill>
+                <a:latin typeface="Arial"/>
+              </a:rPr>
+              <a:t>そして主の愛の奇跡、奇跡が</a:t>
             </a:r>
           </a:p>
         </p:txBody>
